--- a/docs/slides.pptx
+++ b/docs/slides.pptx
@@ -16,6 +16,7 @@
     <p:sldId id="264" r:id="rId15"/>
     <p:sldId id="265" r:id="rId16"/>
     <p:sldId id="266" r:id="rId17"/>
+    <p:sldId id="267" r:id="rId18"/>
   </p:sldIdLst>
   <p:sldSz cx="12191695" cy="6858000" type="screen4x3"/>
   <p:notesSz cx="6858000" cy="9144000"/>
@@ -3100,14 +3101,95 @@
       <p:grpSpPr/>
       <p:sp>
         <p:nvSpPr>
-          <p:cNvPr id="2" name="TextBox 1"/>
+          <p:cNvPr id="2" name="Rectangle 1"/>
+          <p:cNvSpPr/>
+          <p:nvPr/>
+        </p:nvSpPr>
+        <p:spPr>
+          <a:xfrm>
+            <a:off x="0" y="1828800"/>
+            <a:ext cx="12191695" cy="3200400"/>
+          </a:xfrm>
+          <a:prstGeom prst="rect">
+            <a:avLst/>
+          </a:prstGeom>
+          <a:solidFill>
+            <a:srgbClr val="1F4E79"/>
+          </a:solidFill>
+          <a:ln>
+            <a:noFill/>
+          </a:ln>
+        </p:spPr>
+        <p:style>
+          <a:lnRef idx="1">
+            <a:schemeClr val="accent1"/>
+          </a:lnRef>
+          <a:fillRef idx="3">
+            <a:schemeClr val="accent1"/>
+          </a:fillRef>
+          <a:effectRef idx="2">
+            <a:schemeClr val="accent1"/>
+          </a:effectRef>
+          <a:fontRef idx="minor">
+            <a:schemeClr val="lt1"/>
+          </a:fontRef>
+        </p:style>
+        <p:txBody>
+          <a:bodyPr rtlCol="0" anchor="ctr" wrap="square" lIns="731520" tIns="320040"/>
+          <a:lstStyle/>
+          <a:p>
+            <a:pPr algn="ctr">
+              <a:defRPr sz="3000" b="1">
+                <a:solidFill>
+                  <a:srgbClr val="FFFFFF"/>
+                </a:solidFill>
+              </a:defRPr>
+            </a:pPr>
+            <a:r>
+              <a:t>Orthogonal-Frequency-Regularized Discriminative Regression</a:t>
+            </a:r>
+          </a:p>
+          <a:p>
+            <a:pPr>
+              <a:defRPr sz="2600" b="1">
+                <a:solidFill>
+                  <a:srgbClr val="FFFFFF"/>
+                </a:solidFill>
+              </a:defRPr>
+            </a:pPr>
+            <a:r>
+              <a:t>for Real-World Single-Image Super-Resolution</a:t>
+            </a:r>
+          </a:p>
+          <a:p>
+            <a:r>
+              <a:t> </a:t>
+            </a:r>
+          </a:p>
+          <a:p>
+            <a:pPr>
+              <a:defRPr sz="1400">
+                <a:solidFill>
+                  <a:srgbClr val="C7D6E5"/>
+                </a:solidFill>
+              </a:defRPr>
+            </a:pPr>
+            <a:r>
+              <a:t>RealSR (V3) · ×2 · official Test.m (Limited-range Y, no shave, 100 pairs)</a:t>
+            </a:r>
+          </a:p>
+        </p:txBody>
+      </p:sp>
+      <p:sp>
+        <p:nvSpPr>
+          <p:cNvPr id="3" name="TextBox 2"/>
           <p:cNvSpPr txBox="1"/>
           <p:nvPr/>
         </p:nvSpPr>
         <p:spPr>
           <a:xfrm>
-            <a:off x="731520" y="1920240"/>
-            <a:ext cx="10698480" cy="2926080"/>
+            <a:off x="914400" y="5212080"/>
+            <a:ext cx="10332720" cy="822960"/>
           </a:xfrm>
           <a:prstGeom prst="rect">
             <a:avLst/>
@@ -3115,48 +3197,20 @@
           <a:noFill/>
         </p:spPr>
         <p:txBody>
-          <a:bodyPr wrap="square">
+          <a:bodyPr wrap="none">
             <a:spAutoFit/>
           </a:bodyPr>
           <a:lstStyle/>
           <a:p>
-            <a:pPr>
-              <a:defRPr sz="3600" b="1">
+            <a:pPr algn="ctr">
+              <a:defRPr sz="2000" b="1">
                 <a:solidFill>
                   <a:srgbClr val="1F4E79"/>
                 </a:solidFill>
               </a:defRPr>
             </a:pPr>
             <a:r>
-              <a:t>Orthogonal-Frequency-Regularized Discriminative</a:t>
-            </a:r>
-            <a:br/>
-            <a:r>
-              <a:t>Regression for Real-World SR</a:t>
-            </a:r>
-          </a:p>
-          <a:p>
-            <a:pPr>
-              <a:defRPr sz="2000">
-                <a:solidFill>
-                  <a:srgbClr val="606060"/>
-                </a:solidFill>
-              </a:defRPr>
-            </a:pPr>
-            <a:r>
-              <a:t>RealSR (V3) · ×2 · official Test.m protocol</a:t>
-            </a:r>
-          </a:p>
-          <a:p>
-            <a:pPr>
-              <a:defRPr sz="2600" b="1">
-                <a:solidFill>
-                  <a:srgbClr val="222222"/>
-                </a:solidFill>
-              </a:defRPr>
-            </a:pPr>
-            <a:r>
-              <a:t>PSNR-Y 34.41 · SSIM 0.9285 · MUSIQ 55.96 · MANIQA 0.3534</a:t>
+              <a:t>PSNR-Y 34.41   ·   SSIM 0.9285   ·   MUSIQ 55.96   ·   MANIQA 0.3534   (18.7M params)</a:t>
             </a:r>
           </a:p>
         </p:txBody>
@@ -3181,35 +3235,52 @@
       <p:grpSpPr/>
       <p:sp>
         <p:nvSpPr>
-          <p:cNvPr id="2" name="TextBox 1"/>
-          <p:cNvSpPr txBox="1"/>
+          <p:cNvPr id="2" name="Rectangle 1"/>
+          <p:cNvSpPr/>
           <p:nvPr/>
         </p:nvSpPr>
         <p:spPr>
           <a:xfrm>
-            <a:off x="457200" y="320040"/>
-            <a:ext cx="11247120" cy="914400"/>
+            <a:off x="0" y="0"/>
+            <a:ext cx="12191695" cy="1051560"/>
           </a:xfrm>
           <a:prstGeom prst="rect">
             <a:avLst/>
           </a:prstGeom>
-          <a:noFill/>
+          <a:solidFill>
+            <a:srgbClr val="1F4E79"/>
+          </a:solidFill>
+          <a:ln>
+            <a:noFill/>
+          </a:ln>
         </p:spPr>
-        <p:txBody>
-          <a:bodyPr wrap="none">
-            <a:spAutoFit/>
-          </a:bodyPr>
-          <a:lstStyle/>
-          <a:p>
-            <a:pPr>
-              <a:defRPr sz="3000" b="1">
-                <a:solidFill>
-                  <a:srgbClr val="1F4E79"/>
-                </a:solidFill>
-              </a:defRPr>
-            </a:pPr>
-            <a:r>
-              <a:t>Conclusions</a:t>
+        <p:style>
+          <a:lnRef idx="1">
+            <a:schemeClr val="accent1"/>
+          </a:lnRef>
+          <a:fillRef idx="3">
+            <a:schemeClr val="accent1"/>
+          </a:fillRef>
+          <a:effectRef idx="2">
+            <a:schemeClr val="accent1"/>
+          </a:effectRef>
+          <a:fontRef idx="minor">
+            <a:schemeClr val="lt1"/>
+          </a:fontRef>
+        </p:style>
+        <p:txBody>
+          <a:bodyPr rtlCol="0" anchor="ctr" wrap="square" lIns="411480" tIns="109728"/>
+          <a:lstStyle/>
+          <a:p>
+            <a:pPr algn="ctr">
+              <a:defRPr sz="2600" b="1">
+                <a:solidFill>
+                  <a:srgbClr val="FFFFFF"/>
+                </a:solidFill>
+              </a:defRPr>
+            </a:pPr>
+            <a:r>
+              <a:t>Why protocol discipline matters</a:t>
             </a:r>
           </a:p>
         </p:txBody>
@@ -3222,7 +3293,7 @@
         </p:nvSpPr>
         <p:spPr>
           <a:xfrm>
-            <a:off x="548640" y="1463040"/>
+            <a:off x="548640" y="1325880"/>
             <a:ext cx="11064240" cy="4937760"/>
           </a:xfrm>
           <a:prstGeom prst="rect">
@@ -3238,76 +3309,161 @@
           <a:p>
             <a:pPr>
               <a:spcAft>
-                <a:spcPts val="800"/>
+                <a:spcPts val="900"/>
               </a:spcAft>
-              <a:defRPr sz="1800">
+              <a:defRPr sz="1700">
                 <a:solidFill>
                   <a:srgbClr val="222222"/>
                 </a:solidFill>
               </a:defRPr>
             </a:pPr>
             <a:r>
-              <a:t>A recipe wins: stride-1 + wavelet-HF(+shift) + Muon + BSRGAN pretrain + TTA → 34.41 dB / 0.9285 SSIM.</a:t>
+              <a:t>RealSR numbers are inconsistent across papers: Limited-range Y vs full-range RGB</a:t>
+            </a:r>
+          </a:p>
+          <a:p>
+            <a:pPr lvl="1">
+              <a:spcAft>
+                <a:spcPts val="400"/>
+              </a:spcAft>
+              <a:defRPr sz="1500">
+                <a:solidFill>
+                  <a:srgbClr val="444444"/>
+                </a:solidFill>
+              </a:defRPr>
+            </a:pPr>
+            <a:r>
+              <a:t>(Y ≈ 0.4–0.8 dB lower), border shave, test subset, and Protocol A vs B.</a:t>
             </a:r>
           </a:p>
           <a:p>
             <a:pPr>
               <a:spcAft>
-                <a:spcPts val="800"/>
+                <a:spcPts val="900"/>
               </a:spcAft>
-              <a:defRPr sz="1800">
+              <a:defRPr sz="1700">
                 <a:solidFill>
                   <a:srgbClr val="222222"/>
                 </a:solidFill>
               </a:defRPr>
             </a:pPr>
             <a:r>
-              <a:t>PSNR at ×2 is physics-capped (~34.4–35.7 dB): registration, not noise, is the wall.</a:t>
+              <a:t>We report the strictest form and tag every external figure (A-strict / B-128-512 / C-REdeg / D-blind).</a:t>
             </a:r>
           </a:p>
           <a:p>
             <a:pPr>
               <a:spcAft>
-                <a:spcPts val="800"/>
+                <a:spcPts val="900"/>
               </a:spcAft>
-              <a:defRPr sz="1800">
+              <a:defRPr sz="1700">
                 <a:solidFill>
                   <a:srgbClr val="222222"/>
                 </a:solidFill>
               </a:defRPr>
             </a:pPr>
             <a:r>
-              <a:t>×3/×4 are lighter-tuned and still have headroom — the open next step on the fidelity axis.</a:t>
+              <a:t>Pretrained blind weights (Real-ESRGAN etc.) and diffusion SOTA are a different task on a</a:t>
+            </a:r>
+          </a:p>
+          <a:p>
+            <a:pPr lvl="1">
+              <a:spcAft>
+                <a:spcPts val="400"/>
+              </a:spcAft>
+              <a:defRPr sz="1500">
+                <a:solidFill>
+                  <a:srgbClr val="444444"/>
+                </a:solidFill>
+              </a:defRPr>
+            </a:pPr>
+            <a:r>
+              <a:t>re-degraded input — comparing them to a paired-protocol PSNR would be misleading.</a:t>
             </a:r>
           </a:p>
           <a:p>
             <a:pPr>
               <a:spcAft>
-                <a:spcPts val="800"/>
+                <a:spcPts val="900"/>
               </a:spcAft>
-              <a:defRPr sz="1800">
+              <a:defRPr sz="1700">
                 <a:solidFill>
                   <a:srgbClr val="222222"/>
                 </a:solidFill>
               </a:defRPr>
             </a:pPr>
             <a:r>
-              <a:t>Beyond that: perceptual metrics (MUSIQ/LPIPS/FID) are where the remaining gains live.</a:t>
-            </a:r>
-          </a:p>
+              <a:t>Takeaway: our headline is a defensible same-protocol result, not a leaderboard number.</a:t>
+            </a:r>
+          </a:p>
+        </p:txBody>
+      </p:sp>
+      <p:sp>
+        <p:nvSpPr>
+          <p:cNvPr id="4" name="TextBox 3"/>
+          <p:cNvSpPr txBox="1"/>
+          <p:nvPr/>
+        </p:nvSpPr>
+        <p:spPr>
+          <a:xfrm>
+            <a:off x="457200" y="6419088"/>
+            <a:ext cx="8686800" cy="320040"/>
+          </a:xfrm>
+          <a:prstGeom prst="rect">
+            <a:avLst/>
+          </a:prstGeom>
+          <a:noFill/>
+        </p:spPr>
+        <p:txBody>
+          <a:bodyPr wrap="none">
+            <a:spAutoFit/>
+          </a:bodyPr>
+          <a:lstStyle/>
           <a:p>
             <a:pPr>
-              <a:spcAft>
-                <a:spcPts val="800"/>
-              </a:spcAft>
-              <a:defRPr sz="1800">
-                <a:solidFill>
-                  <a:srgbClr val="222222"/>
-                </a:solidFill>
-              </a:defRPr>
-            </a:pPr>
-            <a:r>
-              <a:t>Full chronicle: exp/FINAL_REPORT.md · baselines: docs/baseline/ · ceiling tool: diffusion/oracle.py</a:t>
+              <a:defRPr sz="900">
+                <a:solidFill>
+                  <a:srgbClr val="888888"/>
+                </a:solidFill>
+              </a:defRPr>
+            </a:pPr>
+            <a:r>
+              <a:t>RealSR ×2 · Real-World SR · stride-1 + wavelet-HF + Muon + TTA</a:t>
+            </a:r>
+          </a:p>
+        </p:txBody>
+      </p:sp>
+      <p:sp>
+        <p:nvSpPr>
+          <p:cNvPr id="5" name="TextBox 4"/>
+          <p:cNvSpPr txBox="1"/>
+          <p:nvPr/>
+        </p:nvSpPr>
+        <p:spPr>
+          <a:xfrm>
+            <a:off x="11247120" y="6419088"/>
+            <a:ext cx="822960" cy="320040"/>
+          </a:xfrm>
+          <a:prstGeom prst="rect">
+            <a:avLst/>
+          </a:prstGeom>
+          <a:noFill/>
+        </p:spPr>
+        <p:txBody>
+          <a:bodyPr wrap="none">
+            <a:spAutoFit/>
+          </a:bodyPr>
+          <a:lstStyle/>
+          <a:p>
+            <a:pPr algn="r">
+              <a:defRPr sz="1000">
+                <a:solidFill>
+                  <a:srgbClr val="888888"/>
+                </a:solidFill>
+              </a:defRPr>
+            </a:pPr>
+            <a:r>
+              <a:t>9</a:t>
             </a:r>
           </a:p>
         </p:txBody>
@@ -3332,35 +3488,52 @@
       <p:grpSpPr/>
       <p:sp>
         <p:nvSpPr>
-          <p:cNvPr id="2" name="TextBox 1"/>
-          <p:cNvSpPr txBox="1"/>
+          <p:cNvPr id="2" name="Rectangle 1"/>
+          <p:cNvSpPr/>
           <p:nvPr/>
         </p:nvSpPr>
         <p:spPr>
           <a:xfrm>
-            <a:off x="457200" y="320040"/>
-            <a:ext cx="11247120" cy="914400"/>
+            <a:off x="0" y="0"/>
+            <a:ext cx="12191695" cy="1051560"/>
           </a:xfrm>
           <a:prstGeom prst="rect">
             <a:avLst/>
           </a:prstGeom>
-          <a:noFill/>
+          <a:solidFill>
+            <a:srgbClr val="1F4E79"/>
+          </a:solidFill>
+          <a:ln>
+            <a:noFill/>
+          </a:ln>
         </p:spPr>
-        <p:txBody>
-          <a:bodyPr wrap="none">
-            <a:spAutoFit/>
-          </a:bodyPr>
-          <a:lstStyle/>
-          <a:p>
-            <a:pPr>
-              <a:defRPr sz="3000" b="1">
-                <a:solidFill>
-                  <a:srgbClr val="1F4E79"/>
-                </a:solidFill>
-              </a:defRPr>
-            </a:pPr>
-            <a:r>
-              <a:t>References</a:t>
+        <p:style>
+          <a:lnRef idx="1">
+            <a:schemeClr val="accent1"/>
+          </a:lnRef>
+          <a:fillRef idx="3">
+            <a:schemeClr val="accent1"/>
+          </a:fillRef>
+          <a:effectRef idx="2">
+            <a:schemeClr val="accent1"/>
+          </a:effectRef>
+          <a:fontRef idx="minor">
+            <a:schemeClr val="lt1"/>
+          </a:fontRef>
+        </p:style>
+        <p:txBody>
+          <a:bodyPr rtlCol="0" anchor="ctr" wrap="square" lIns="411480" tIns="109728"/>
+          <a:lstStyle/>
+          <a:p>
+            <a:pPr algn="ctr">
+              <a:defRPr sz="2600" b="1">
+                <a:solidFill>
+                  <a:srgbClr val="FFFFFF"/>
+                </a:solidFill>
+              </a:defRPr>
+            </a:pPr>
+            <a:r>
+              <a:t>Conclusions &amp; what's next</a:t>
             </a:r>
           </a:p>
         </p:txBody>
@@ -3373,7 +3546,7 @@
         </p:nvSpPr>
         <p:spPr>
           <a:xfrm>
-            <a:off x="548640" y="1463040"/>
+            <a:off x="548640" y="1325880"/>
             <a:ext cx="11064240" cy="4937760"/>
           </a:xfrm>
           <a:prstGeom prst="rect">
@@ -3389,106 +3562,444 @@
           <a:p>
             <a:pPr>
               <a:spcAft>
-                <a:spcPts val="800"/>
+                <a:spcPts val="900"/>
               </a:spcAft>
-              <a:defRPr sz="1800">
+              <a:defRPr sz="1700">
                 <a:solidFill>
                   <a:srgbClr val="222222"/>
                 </a:solidFill>
               </a:defRPr>
             </a:pPr>
             <a:r>
-              <a:t>Cai et al., RealSR / LP-KPN, ICCV 2019.</a:t>
+              <a:t>A recipe wins: stride-1 + wavelet-HF(+shift) + Muon + BSRGAN pretrain + TTA → 34.41 dB / 0.9285 SSIM.</a:t>
             </a:r>
           </a:p>
           <a:p>
             <a:pPr>
               <a:spcAft>
-                <a:spcPts val="800"/>
+                <a:spcPts val="900"/>
               </a:spcAft>
-              <a:defRPr sz="1800">
+              <a:defRPr sz="1700">
                 <a:solidFill>
                   <a:srgbClr val="222222"/>
                 </a:solidFill>
               </a:defRPr>
             </a:pPr>
             <a:r>
-              <a:t>Liang et al., SwinIR, ICCV-W 2021.  Lim et al., EDSR, CVPR-W 2017.  Zhang et al., RCAN, ECCV 2018.</a:t>
+              <a:t>×2 PSNR is physics-capped (~34.4–35.7 dB, registration) — we are at the ceiling, not model-capped.</a:t>
             </a:r>
           </a:p>
           <a:p>
             <a:pPr>
               <a:spcAft>
-                <a:spcPts val="800"/>
+                <a:spcPts val="900"/>
               </a:spcAft>
-              <a:defRPr sz="1800">
+              <a:defRPr sz="1700">
                 <a:solidFill>
                   <a:srgbClr val="222222"/>
                 </a:solidFill>
               </a:defRPr>
             </a:pPr>
             <a:r>
-              <a:t>Wang et al., ESRGAN, ECCV-W 2018.  Zhang et al., BSRGAN, ICCV 2021.  Wang et al., Real-ESRGAN, ICCV-W 2021.</a:t>
+              <a:t>Open fidelity headroom is at ×3/×4 (lighter-tuned here): 31.13 vs ceiling 34.4 (×3).</a:t>
             </a:r>
           </a:p>
           <a:p>
             <a:pPr>
               <a:spcAft>
-                <a:spcPts val="800"/>
+                <a:spcPts val="900"/>
               </a:spcAft>
-              <a:defRPr sz="1800">
+              <a:defRPr sz="1700">
                 <a:solidFill>
                   <a:srgbClr val="222222"/>
                 </a:solidFill>
               </a:defRPr>
             </a:pPr>
             <a:r>
-              <a:t>Qiao et al., RealSR-R1, arXiv:2506.16796, 2025.  TinySR, arXiv:2508.17434, 2025.</a:t>
+              <a:t>Beyond fidelity: the frontier is perceptual (MUSIQ / LPIPS / FID) and data-limited at this scale.</a:t>
             </a:r>
           </a:p>
           <a:p>
             <a:pPr>
               <a:spcAft>
-                <a:spcPts val="800"/>
+                <a:spcPts val="900"/>
               </a:spcAft>
-              <a:defRPr sz="1800">
+              <a:defRPr sz="1700">
                 <a:solidFill>
                   <a:srgbClr val="222222"/>
                 </a:solidFill>
               </a:defRPr>
             </a:pPr>
             <a:r>
-              <a:t>Blau &amp; Michaeli, Perception-Distortion Tradeoff, CVPR 2018 (DOI 10.1109/CVPR.2018.00652).</a:t>
+              <a:t>Reproduce:  README §9  ·  measure the ceiling: python -m diffusion.oracle --scale 2</a:t>
             </a:r>
           </a:p>
           <a:p>
             <a:pPr>
               <a:spcAft>
-                <a:spcPts val="800"/>
+                <a:spcPts val="900"/>
               </a:spcAft>
-              <a:defRPr sz="1800">
+              <a:defRPr sz="1700">
                 <a:solidFill>
                   <a:srgbClr val="222222"/>
                 </a:solidFill>
               </a:defRPr>
             </a:pPr>
             <a:r>
-              <a:t>Baker &amp; Kanade, Limits on SR, TPAMI 2002 (DOI 10.1109/TPAMI.2002.1033210).</a:t>
-            </a:r>
-          </a:p>
+              <a:t>Artefacts: exp/FINAL_REPORT.md · docs/baseline/ · docs/figs · this deck (docs/slides.pptx).</a:t>
+            </a:r>
+          </a:p>
+        </p:txBody>
+      </p:sp>
+      <p:sp>
+        <p:nvSpPr>
+          <p:cNvPr id="4" name="TextBox 3"/>
+          <p:cNvSpPr txBox="1"/>
+          <p:nvPr/>
+        </p:nvSpPr>
+        <p:spPr>
+          <a:xfrm>
+            <a:off x="457200" y="6419088"/>
+            <a:ext cx="8686800" cy="320040"/>
+          </a:xfrm>
+          <a:prstGeom prst="rect">
+            <a:avLst/>
+          </a:prstGeom>
+          <a:noFill/>
+        </p:spPr>
+        <p:txBody>
+          <a:bodyPr wrap="none">
+            <a:spAutoFit/>
+          </a:bodyPr>
+          <a:lstStyle/>
+          <a:p>
+            <a:pPr>
+              <a:defRPr sz="900">
+                <a:solidFill>
+                  <a:srgbClr val="888888"/>
+                </a:solidFill>
+              </a:defRPr>
+            </a:pPr>
+            <a:r>
+              <a:t>RealSR ×2 · Real-World SR · stride-1 + wavelet-HF + Muon + TTA</a:t>
+            </a:r>
+          </a:p>
+        </p:txBody>
+      </p:sp>
+      <p:sp>
+        <p:nvSpPr>
+          <p:cNvPr id="5" name="TextBox 4"/>
+          <p:cNvSpPr txBox="1"/>
+          <p:nvPr/>
+        </p:nvSpPr>
+        <p:spPr>
+          <a:xfrm>
+            <a:off x="11247120" y="6419088"/>
+            <a:ext cx="822960" cy="320040"/>
+          </a:xfrm>
+          <a:prstGeom prst="rect">
+            <a:avLst/>
+          </a:prstGeom>
+          <a:noFill/>
+        </p:spPr>
+        <p:txBody>
+          <a:bodyPr wrap="none">
+            <a:spAutoFit/>
+          </a:bodyPr>
+          <a:lstStyle/>
+          <a:p>
+            <a:pPr algn="r">
+              <a:defRPr sz="1000">
+                <a:solidFill>
+                  <a:srgbClr val="888888"/>
+                </a:solidFill>
+              </a:defRPr>
+            </a:pPr>
+            <a:r>
+              <a:t>10</a:t>
+            </a:r>
+          </a:p>
+        </p:txBody>
+      </p:sp>
+    </p:spTree>
+  </p:cSld>
+  <p:clrMapOvr>
+    <a:masterClrMapping/>
+  </p:clrMapOvr>
+</p:sld>
+</file>
+
+<file path=ppt/slides/slide12.xml><?xml version="1.0" encoding="utf-8"?>
+<p:sld xmlns:a="http://schemas.openxmlformats.org/drawingml/2006/main" xmlns:p="http://schemas.openxmlformats.org/presentationml/2006/main" xmlns:r="http://schemas.openxmlformats.org/officeDocument/2006/relationships">
+  <p:cSld>
+    <p:spTree>
+      <p:nvGrpSpPr>
+        <p:cNvPr id="1" name=""/>
+        <p:cNvGrpSpPr/>
+        <p:nvPr/>
+      </p:nvGrpSpPr>
+      <p:grpSpPr/>
+      <p:sp>
+        <p:nvSpPr>
+          <p:cNvPr id="2" name="Rectangle 1"/>
+          <p:cNvSpPr/>
+          <p:nvPr/>
+        </p:nvSpPr>
+        <p:spPr>
+          <a:xfrm>
+            <a:off x="0" y="0"/>
+            <a:ext cx="12191695" cy="1051560"/>
+          </a:xfrm>
+          <a:prstGeom prst="rect">
+            <a:avLst/>
+          </a:prstGeom>
+          <a:solidFill>
+            <a:srgbClr val="1F4E79"/>
+          </a:solidFill>
+          <a:ln>
+            <a:noFill/>
+          </a:ln>
+        </p:spPr>
+        <p:style>
+          <a:lnRef idx="1">
+            <a:schemeClr val="accent1"/>
+          </a:lnRef>
+          <a:fillRef idx="3">
+            <a:schemeClr val="accent1"/>
+          </a:fillRef>
+          <a:effectRef idx="2">
+            <a:schemeClr val="accent1"/>
+          </a:effectRef>
+          <a:fontRef idx="minor">
+            <a:schemeClr val="lt1"/>
+          </a:fontRef>
+        </p:style>
+        <p:txBody>
+          <a:bodyPr rtlCol="0" anchor="ctr" wrap="square" lIns="411480" tIns="109728"/>
+          <a:lstStyle/>
+          <a:p>
+            <a:pPr algn="ctr">
+              <a:defRPr sz="2600" b="1">
+                <a:solidFill>
+                  <a:srgbClr val="FFFFFF"/>
+                </a:solidFill>
+              </a:defRPr>
+            </a:pPr>
+            <a:r>
+              <a:t>References</a:t>
+            </a:r>
+          </a:p>
+        </p:txBody>
+      </p:sp>
+      <p:sp>
+        <p:nvSpPr>
+          <p:cNvPr id="3" name="TextBox 2"/>
+          <p:cNvSpPr txBox="1"/>
+          <p:nvPr/>
+        </p:nvSpPr>
+        <p:spPr>
+          <a:xfrm>
+            <a:off x="548640" y="1325880"/>
+            <a:ext cx="11064240" cy="4937760"/>
+          </a:xfrm>
+          <a:prstGeom prst="rect">
+            <a:avLst/>
+          </a:prstGeom>
+          <a:noFill/>
+        </p:spPr>
+        <p:txBody>
+          <a:bodyPr wrap="square">
+            <a:spAutoFit/>
+          </a:bodyPr>
+          <a:lstStyle/>
           <a:p>
             <a:pPr>
               <a:spcAft>
-                <a:spcPts val="800"/>
+                <a:spcPts val="900"/>
               </a:spcAft>
-              <a:defRPr sz="1800">
+              <a:defRPr sz="1700">
                 <a:solidFill>
                   <a:srgbClr val="222222"/>
                 </a:solidFill>
               </a:defRPr>
             </a:pPr>
             <a:r>
-              <a:t>Robinson &amp; Milanfar, TIP 2004/2006.  Chatterjee &amp; Milanfar, TIP 2010.</a:t>
+              <a:t>Cai et al., RealSR / LP-KPN, ICCV 2019.</a:t>
+            </a:r>
+          </a:p>
+          <a:p>
+            <a:pPr>
+              <a:spcAft>
+                <a:spcPts val="900"/>
+              </a:spcAft>
+              <a:defRPr sz="1700">
+                <a:solidFill>
+                  <a:srgbClr val="222222"/>
+                </a:solidFill>
+              </a:defRPr>
+            </a:pPr>
+            <a:r>
+              <a:t>Liang et al., SwinIR, ICCV-W 2021 · Lim et al., EDSR, CVPR-W 2017 · Zhang et al., RCAN, ECCV 2018.</a:t>
+            </a:r>
+          </a:p>
+          <a:p>
+            <a:pPr>
+              <a:spcAft>
+                <a:spcPts val="900"/>
+              </a:spcAft>
+              <a:defRPr sz="1700">
+                <a:solidFill>
+                  <a:srgbClr val="222222"/>
+                </a:solidFill>
+              </a:defRPr>
+            </a:pPr>
+            <a:r>
+              <a:t>Wang et al., ESRGAN, ECCV-W 2018 · Zhang et al., BSRGAN, ICCV 2021 · Wang et al., Real-ESRGAN, ICCV-W 2021.</a:t>
+            </a:r>
+          </a:p>
+          <a:p>
+            <a:pPr>
+              <a:spcAft>
+                <a:spcPts val="900"/>
+              </a:spcAft>
+              <a:defRPr sz="1700">
+                <a:solidFill>
+                  <a:srgbClr val="222222"/>
+                </a:solidFill>
+              </a:defRPr>
+            </a:pPr>
+            <a:r>
+              <a:t>Qiao et al., RealSR-R1, arXiv:2506.16796 (2025) · TinySR, arXiv:2508.17434 (2025) — baseline tables.</a:t>
+            </a:r>
+          </a:p>
+          <a:p>
+            <a:pPr>
+              <a:spcAft>
+                <a:spcPts val="900"/>
+              </a:spcAft>
+              <a:defRPr sz="1700">
+                <a:solidFill>
+                  <a:srgbClr val="222222"/>
+                </a:solidFill>
+              </a:defRPr>
+            </a:pPr>
+            <a:r>
+              <a:t>Blau &amp; Michaeli, The Perception-Distortion Tradeoff, CVPR 2018 (DOI 10.1109/CVPR.2018.00652).</a:t>
+            </a:r>
+          </a:p>
+          <a:p>
+            <a:pPr>
+              <a:spcAft>
+                <a:spcPts val="900"/>
+              </a:spcAft>
+              <a:defRPr sz="1700">
+                <a:solidFill>
+                  <a:srgbClr val="222222"/>
+                </a:solidFill>
+              </a:defRPr>
+            </a:pPr>
+            <a:r>
+              <a:t>Baker &amp; Kanade, Limits on Super-Resolution..., IEEE TPAMI 2002 (DOI 10.1109/TPAMI.2002.1033210).</a:t>
+            </a:r>
+          </a:p>
+          <a:p>
+            <a:pPr>
+              <a:spcAft>
+                <a:spcPts val="900"/>
+              </a:spcAft>
+              <a:defRPr sz="1700">
+                <a:solidFill>
+                  <a:srgbClr val="222222"/>
+                </a:solidFill>
+              </a:defRPr>
+            </a:pPr>
+            <a:r>
+              <a:t>Robinson &amp; Milanfar, Fundamental Limits in Image Registration (TIP 2004) &amp; Statistical SR (TIP 2006).</a:t>
+            </a:r>
+          </a:p>
+          <a:p>
+            <a:pPr>
+              <a:spcAft>
+                <a:spcPts val="900"/>
+              </a:spcAft>
+              <a:defRPr sz="1700">
+                <a:solidFill>
+                  <a:srgbClr val="222222"/>
+                </a:solidFill>
+              </a:defRPr>
+            </a:pPr>
+            <a:r>
+              <a:t>Chatterjee &amp; Milanfar, Is Denoising Dead?, IEEE TIP 2010 · Zhou et al., Updating the Evaluation of SR, CVPR 2021.</a:t>
+            </a:r>
+          </a:p>
+        </p:txBody>
+      </p:sp>
+      <p:sp>
+        <p:nvSpPr>
+          <p:cNvPr id="4" name="TextBox 3"/>
+          <p:cNvSpPr txBox="1"/>
+          <p:nvPr/>
+        </p:nvSpPr>
+        <p:spPr>
+          <a:xfrm>
+            <a:off x="457200" y="6419088"/>
+            <a:ext cx="8686800" cy="320040"/>
+          </a:xfrm>
+          <a:prstGeom prst="rect">
+            <a:avLst/>
+          </a:prstGeom>
+          <a:noFill/>
+        </p:spPr>
+        <p:txBody>
+          <a:bodyPr wrap="none">
+            <a:spAutoFit/>
+          </a:bodyPr>
+          <a:lstStyle/>
+          <a:p>
+            <a:pPr>
+              <a:defRPr sz="900">
+                <a:solidFill>
+                  <a:srgbClr val="888888"/>
+                </a:solidFill>
+              </a:defRPr>
+            </a:pPr>
+            <a:r>
+              <a:t>RealSR ×2 · Real-World SR · stride-1 + wavelet-HF + Muon + TTA</a:t>
+            </a:r>
+          </a:p>
+        </p:txBody>
+      </p:sp>
+      <p:sp>
+        <p:nvSpPr>
+          <p:cNvPr id="5" name="TextBox 4"/>
+          <p:cNvSpPr txBox="1"/>
+          <p:nvPr/>
+        </p:nvSpPr>
+        <p:spPr>
+          <a:xfrm>
+            <a:off x="11247120" y="6419088"/>
+            <a:ext cx="822960" cy="320040"/>
+          </a:xfrm>
+          <a:prstGeom prst="rect">
+            <a:avLst/>
+          </a:prstGeom>
+          <a:noFill/>
+        </p:spPr>
+        <p:txBody>
+          <a:bodyPr wrap="none">
+            <a:spAutoFit/>
+          </a:bodyPr>
+          <a:lstStyle/>
+          <a:p>
+            <a:pPr algn="r">
+              <a:defRPr sz="1000">
+                <a:solidFill>
+                  <a:srgbClr val="888888"/>
+                </a:solidFill>
+              </a:defRPr>
+            </a:pPr>
+            <a:r>
+              <a:t>11</a:t>
             </a:r>
           </a:p>
         </p:txBody>
@@ -3513,14 +4024,102 @@
       <p:grpSpPr/>
       <p:sp>
         <p:nvSpPr>
-          <p:cNvPr id="2" name="TextBox 1"/>
+          <p:cNvPr id="2" name="Rectangle 1"/>
+          <p:cNvSpPr/>
+          <p:nvPr/>
+        </p:nvSpPr>
+        <p:spPr>
+          <a:xfrm>
+            <a:off x="0" y="0"/>
+            <a:ext cx="12191695" cy="1051560"/>
+          </a:xfrm>
+          <a:prstGeom prst="rect">
+            <a:avLst/>
+          </a:prstGeom>
+          <a:solidFill>
+            <a:srgbClr val="1F4E79"/>
+          </a:solidFill>
+          <a:ln>
+            <a:noFill/>
+          </a:ln>
+        </p:spPr>
+        <p:style>
+          <a:lnRef idx="1">
+            <a:schemeClr val="accent1"/>
+          </a:lnRef>
+          <a:fillRef idx="3">
+            <a:schemeClr val="accent1"/>
+          </a:fillRef>
+          <a:effectRef idx="2">
+            <a:schemeClr val="accent1"/>
+          </a:effectRef>
+          <a:fontRef idx="minor">
+            <a:schemeClr val="lt1"/>
+          </a:fontRef>
+        </p:style>
+        <p:txBody>
+          <a:bodyPr rtlCol="0" anchor="ctr" wrap="square" lIns="411480" tIns="109728"/>
+          <a:lstStyle/>
+          <a:p>
+            <a:pPr algn="ctr">
+              <a:defRPr sz="2600" b="1">
+                <a:solidFill>
+                  <a:srgbClr val="FFFFFF"/>
+                </a:solidFill>
+              </a:defRPr>
+            </a:pPr>
+            <a:r>
+              <a:t>Results on the official paired protocol</a:t>
+            </a:r>
+          </a:p>
+          <a:p>
+            <a:pPr>
+              <a:defRPr sz="1300">
+                <a:solidFill>
+                  <a:srgbClr val="C7D6E5"/>
+                </a:solidFill>
+              </a:defRPr>
+            </a:pPr>
+            <a:r>
+              <a:t>Ours tops every fidelity/structure metric; dashed line = our result</a:t>
+            </a:r>
+          </a:p>
+        </p:txBody>
+      </p:sp>
+      <p:pic>
+        <p:nvPicPr>
+          <p:cNvPr id="3" name="Picture 2" descr="fig_results.png"/>
+          <p:cNvPicPr>
+            <a:picLocks noChangeAspect="1"/>
+          </p:cNvPicPr>
+          <p:nvPr/>
+        </p:nvPicPr>
+        <p:blipFill>
+          <a:blip r:embed="rId2"/>
+          <a:stretch>
+            <a:fillRect/>
+          </a:stretch>
+        </p:blipFill>
+        <p:spPr>
+          <a:xfrm>
+            <a:off x="640080" y="1325880"/>
+            <a:ext cx="10881360" cy="3994720"/>
+          </a:xfrm>
+          <a:prstGeom prst="rect">
+            <a:avLst/>
+          </a:prstGeom>
+        </p:spPr>
+      </p:pic>
+      <p:sp>
+        <p:nvSpPr>
+          <p:cNvPr id="4" name="TextBox 3"/>
           <p:cNvSpPr txBox="1"/>
           <p:nvPr/>
         </p:nvSpPr>
         <p:spPr>
           <a:xfrm>
-            <a:off x="457200" y="320040"/>
-            <a:ext cx="11247120" cy="914400"/>
+            <a:off x="640080" y="5989320"/>
+            <a:ext cx="10881360" cy="365760"/>
           </a:xfrm>
           <a:prstGeom prst="rect">
             <a:avLst/>
@@ -3533,29 +4132,29 @@
           </a:bodyPr>
           <a:lstStyle/>
           <a:p>
-            <a:pPr>
-              <a:defRPr sz="3000" b="1">
-                <a:solidFill>
-                  <a:srgbClr val="1F4E79"/>
-                </a:solidFill>
-              </a:defRPr>
-            </a:pPr>
-            <a:r>
-              <a:t>Problem &amp; the honest protocol</a:t>
-            </a:r>
-          </a:p>
-        </p:txBody>
-      </p:sp>
-      <p:sp>
-        <p:nvSpPr>
-          <p:cNvPr id="3" name="TextBox 2"/>
+            <a:pPr algn="ctr">
+              <a:defRPr sz="1100">
+                <a:solidFill>
+                  <a:srgbClr val="606060"/>
+                </a:solidFill>
+              </a:defRPr>
+            </a:pPr>
+            <a:r>
+              <a:t>Reproduced baselines share our exact A-strict protocol.  vs re-trained SwinIR: +1.44 dB / +0.023 SSIM / +9.2 MUSIQ / +0.048 MANIQA</a:t>
+            </a:r>
+          </a:p>
+        </p:txBody>
+      </p:sp>
+      <p:sp>
+        <p:nvSpPr>
+          <p:cNvPr id="5" name="TextBox 4"/>
           <p:cNvSpPr txBox="1"/>
           <p:nvPr/>
         </p:nvSpPr>
         <p:spPr>
           <a:xfrm>
-            <a:off x="548640" y="1463040"/>
-            <a:ext cx="11064240" cy="4937760"/>
+            <a:off x="457200" y="6419088"/>
+            <a:ext cx="8686800" cy="320040"/>
           </a:xfrm>
           <a:prstGeom prst="rect">
             <a:avLst/>
@@ -3563,98 +4162,55 @@
           <a:noFill/>
         </p:spPr>
         <p:txBody>
-          <a:bodyPr wrap="square">
+          <a:bodyPr wrap="none">
             <a:spAutoFit/>
           </a:bodyPr>
           <a:lstStyle/>
           <a:p>
             <a:pPr>
-              <a:spcAft>
-                <a:spcPts val="800"/>
-              </a:spcAft>
-              <a:defRPr sz="1800">
-                <a:solidFill>
-                  <a:srgbClr val="222222"/>
-                </a:solidFill>
-              </a:defRPr>
-            </a:pPr>
-            <a:r>
-              <a:t>RealSR = real camera zoom pairs (Canon 5D3 / Nikon D810); 390 train, 100 test.</a:t>
-            </a:r>
-          </a:p>
-          <a:p>
-            <a:pPr>
-              <a:spcAft>
-                <a:spcPts val="800"/>
-              </a:spcAft>
-              <a:defRPr sz="1800">
-                <a:solidFill>
-                  <a:srgbClr val="222222"/>
-                </a:solidFill>
-              </a:defRPr>
-            </a:pPr>
-            <a:r>
-              <a:t>Numbers are NOT comparable across papers — protocol differs:</a:t>
-            </a:r>
-          </a:p>
-          <a:p>
-            <a:pPr>
-              <a:spcAft>
-                <a:spcPts val="800"/>
-              </a:spcAft>
-              <a:defRPr sz="1800">
-                <a:solidFill>
-                  <a:srgbClr val="222222"/>
-                </a:solidFill>
-              </a:defRPr>
-            </a:pPr>
-            <a:r>
-              <a:t>   • Limited-range Y vs full-range RGB (Y is 0.4–0.8 dB lower)</a:t>
-            </a:r>
-          </a:p>
-          <a:p>
-            <a:pPr>
-              <a:spcAft>
-                <a:spcPts val="800"/>
-              </a:spcAft>
-              <a:defRPr sz="1800">
-                <a:solidFill>
-                  <a:srgbClr val="222222"/>
-                </a:solidFill>
-              </a:defRPr>
-            </a:pPr>
-            <a:r>
-              <a:t>   • border shave, test-subset choice, Protocol A (trained on RealSR) vs B (pretrained blind)</a:t>
-            </a:r>
-          </a:p>
-          <a:p>
-            <a:pPr>
-              <a:spcAft>
-                <a:spcPts val="800"/>
-              </a:spcAft>
-              <a:defRPr sz="1800">
-                <a:solidFill>
-                  <a:srgbClr val="222222"/>
-                </a:solidFill>
-              </a:defRPr>
-            </a:pPr>
-            <a:r>
-              <a:t>We report the STRICTEST form: Limited-range Y, uint8, modcrop4, NO shave, all 100 pairs.</a:t>
-            </a:r>
-          </a:p>
-          <a:p>
-            <a:pPr>
-              <a:spcAft>
-                <a:spcPts val="800"/>
-              </a:spcAft>
-              <a:defRPr sz="1800">
-                <a:solidFill>
-                  <a:srgbClr val="222222"/>
-                </a:solidFill>
-              </a:defRPr>
-            </a:pPr>
-            <a:r>
-              <a:t>Every external number in this deck carries a protocol tag.</a:t>
+              <a:defRPr sz="900">
+                <a:solidFill>
+                  <a:srgbClr val="888888"/>
+                </a:solidFill>
+              </a:defRPr>
+            </a:pPr>
+            <a:r>
+              <a:t>RealSR ×2 · Real-World SR · stride-1 + wavelet-HF + Muon + TTA</a:t>
+            </a:r>
+          </a:p>
+        </p:txBody>
+      </p:sp>
+      <p:sp>
+        <p:nvSpPr>
+          <p:cNvPr id="6" name="TextBox 5"/>
+          <p:cNvSpPr txBox="1"/>
+          <p:nvPr/>
+        </p:nvSpPr>
+        <p:spPr>
+          <a:xfrm>
+            <a:off x="11247120" y="6419088"/>
+            <a:ext cx="822960" cy="320040"/>
+          </a:xfrm>
+          <a:prstGeom prst="rect">
+            <a:avLst/>
+          </a:prstGeom>
+          <a:noFill/>
+        </p:spPr>
+        <p:txBody>
+          <a:bodyPr wrap="none">
+            <a:spAutoFit/>
+          </a:bodyPr>
+          <a:lstStyle/>
+          <a:p>
+            <a:pPr algn="r">
+              <a:defRPr sz="1000">
+                <a:solidFill>
+                  <a:srgbClr val="888888"/>
+                </a:solidFill>
+              </a:defRPr>
+            </a:pPr>
+            <a:r>
+              <a:t>1</a:t>
             </a:r>
           </a:p>
         </p:txBody>
@@ -3679,14 +4235,1576 @@
       <p:grpSpPr/>
       <p:sp>
         <p:nvSpPr>
-          <p:cNvPr id="2" name="TextBox 1"/>
+          <p:cNvPr id="2" name="Rectangle 1"/>
+          <p:cNvSpPr/>
+          <p:nvPr/>
+        </p:nvSpPr>
+        <p:spPr>
+          <a:xfrm>
+            <a:off x="0" y="0"/>
+            <a:ext cx="12191695" cy="1051560"/>
+          </a:xfrm>
+          <a:prstGeom prst="rect">
+            <a:avLst/>
+          </a:prstGeom>
+          <a:solidFill>
+            <a:srgbClr val="1F4E79"/>
+          </a:solidFill>
+          <a:ln>
+            <a:noFill/>
+          </a:ln>
+        </p:spPr>
+        <p:style>
+          <a:lnRef idx="1">
+            <a:schemeClr val="accent1"/>
+          </a:lnRef>
+          <a:fillRef idx="3">
+            <a:schemeClr val="accent1"/>
+          </a:fillRef>
+          <a:effectRef idx="2">
+            <a:schemeClr val="accent1"/>
+          </a:effectRef>
+          <a:fontRef idx="minor">
+            <a:schemeClr val="lt1"/>
+          </a:fontRef>
+        </p:style>
+        <p:txBody>
+          <a:bodyPr rtlCol="0" anchor="ctr" wrap="square" lIns="411480" tIns="109728"/>
+          <a:lstStyle/>
+          <a:p>
+            <a:pPr algn="ctr">
+              <a:defRPr sz="2600" b="1">
+                <a:solidFill>
+                  <a:srgbClr val="FFFFFF"/>
+                </a:solidFill>
+              </a:defRPr>
+            </a:pPr>
+            <a:r>
+              <a:t>Results — official paired protocol (100 pairs)</a:t>
+            </a:r>
+          </a:p>
+          <a:p>
+            <a:pPr>
+              <a:defRPr sz="1300">
+                <a:solidFill>
+                  <a:srgbClr val="C7D6E5"/>
+                </a:solidFill>
+              </a:defRPr>
+            </a:pPr>
+            <a:r>
+              <a:t>Limited-range Y · uint8 · modcrop4 · no shave</a:t>
+            </a:r>
+          </a:p>
+        </p:txBody>
+      </p:sp>
+      <p:graphicFrame>
+        <p:nvGraphicFramePr>
+          <p:cNvPr id="3" name="Table 2"/>
+          <p:cNvGraphicFramePr>
+            <a:graphicFrameLocks noGrp="1"/>
+          </p:cNvGraphicFramePr>
+          <p:nvPr/>
+        </p:nvGraphicFramePr>
+        <p:xfrm>
+          <a:off x="365760" y="1371600"/>
+          <a:ext cx="11430000" cy="3456432"/>
+        </p:xfrm>
+        <a:graphic>
+          <a:graphicData uri="http://schemas.openxmlformats.org/drawingml/2006/table">
+            <a:tbl>
+              <a:tblPr firstRow="1" bandRow="1">
+                <a:tableStyleId>{5C22544A-7EE6-4342-B048-85BDC9FD1C3A}</a:tableStyleId>
+              </a:tblPr>
+              <a:tblGrid>
+                <a:gridCol w="1632857"/>
+                <a:gridCol w="1632857"/>
+                <a:gridCol w="1632857"/>
+                <a:gridCol w="1632857"/>
+                <a:gridCol w="1632857"/>
+                <a:gridCol w="1632857"/>
+                <a:gridCol w="1632858"/>
+              </a:tblGrid>
+              <a:tr h="384048">
+                <a:tc>
+                  <a:txBody>
+                    <a:bodyPr/>
+                    <a:lstStyle/>
+                    <a:p>
+                      <a:pPr>
+                        <a:defRPr sz="1200" b="1">
+                          <a:solidFill>
+                            <a:srgbClr val="FFFFFF"/>
+                          </a:solidFill>
+                        </a:defRPr>
+                      </a:pPr>
+                      <a:r>
+                        <a:t>Method</a:t>
+                      </a:r>
+                    </a:p>
+                  </a:txBody>
+                  <a:tcPr marT="45720" marB="45720">
+                    <a:solidFill>
+                      <a:srgbClr val="1F4E79"/>
+                    </a:solidFill>
+                  </a:tcPr>
+                </a:tc>
+                <a:tc>
+                  <a:txBody>
+                    <a:bodyPr/>
+                    <a:lstStyle/>
+                    <a:p>
+                      <a:pPr>
+                        <a:defRPr sz="1200" b="1">
+                          <a:solidFill>
+                            <a:srgbClr val="FFFFFF"/>
+                          </a:solidFill>
+                        </a:defRPr>
+                      </a:pPr>
+                      <a:r>
+                        <a:t>Type</a:t>
+                      </a:r>
+                    </a:p>
+                  </a:txBody>
+                  <a:tcPr marT="45720" marB="45720">
+                    <a:solidFill>
+                      <a:srgbClr val="1F4E79"/>
+                    </a:solidFill>
+                  </a:tcPr>
+                </a:tc>
+                <a:tc>
+                  <a:txBody>
+                    <a:bodyPr/>
+                    <a:lstStyle/>
+                    <a:p>
+                      <a:pPr>
+                        <a:defRPr sz="1200" b="1">
+                          <a:solidFill>
+                            <a:srgbClr val="FFFFFF"/>
+                          </a:solidFill>
+                        </a:defRPr>
+                      </a:pPr>
+                      <a:r>
+                        <a:t>Params</a:t>
+                      </a:r>
+                    </a:p>
+                  </a:txBody>
+                  <a:tcPr marT="45720" marB="45720">
+                    <a:solidFill>
+                      <a:srgbClr val="1F4E79"/>
+                    </a:solidFill>
+                  </a:tcPr>
+                </a:tc>
+                <a:tc>
+                  <a:txBody>
+                    <a:bodyPr/>
+                    <a:lstStyle/>
+                    <a:p>
+                      <a:pPr>
+                        <a:defRPr sz="1200" b="1">
+                          <a:solidFill>
+                            <a:srgbClr val="FFFFFF"/>
+                          </a:solidFill>
+                        </a:defRPr>
+                      </a:pPr>
+                      <a:r>
+                        <a:t>PSNR-Y</a:t>
+                      </a:r>
+                    </a:p>
+                  </a:txBody>
+                  <a:tcPr marT="45720" marB="45720">
+                    <a:solidFill>
+                      <a:srgbClr val="1F4E79"/>
+                    </a:solidFill>
+                  </a:tcPr>
+                </a:tc>
+                <a:tc>
+                  <a:txBody>
+                    <a:bodyPr/>
+                    <a:lstStyle/>
+                    <a:p>
+                      <a:pPr>
+                        <a:defRPr sz="1200" b="1">
+                          <a:solidFill>
+                            <a:srgbClr val="FFFFFF"/>
+                          </a:solidFill>
+                        </a:defRPr>
+                      </a:pPr>
+                      <a:r>
+                        <a:t>SSIM</a:t>
+                      </a:r>
+                    </a:p>
+                  </a:txBody>
+                  <a:tcPr marT="45720" marB="45720">
+                    <a:solidFill>
+                      <a:srgbClr val="1F4E79"/>
+                    </a:solidFill>
+                  </a:tcPr>
+                </a:tc>
+                <a:tc>
+                  <a:txBody>
+                    <a:bodyPr/>
+                    <a:lstStyle/>
+                    <a:p>
+                      <a:pPr>
+                        <a:defRPr sz="1200" b="1">
+                          <a:solidFill>
+                            <a:srgbClr val="FFFFFF"/>
+                          </a:solidFill>
+                        </a:defRPr>
+                      </a:pPr>
+                      <a:r>
+                        <a:t>MUSIQ</a:t>
+                      </a:r>
+                    </a:p>
+                  </a:txBody>
+                  <a:tcPr marT="45720" marB="45720">
+                    <a:solidFill>
+                      <a:srgbClr val="1F4E79"/>
+                    </a:solidFill>
+                  </a:tcPr>
+                </a:tc>
+                <a:tc>
+                  <a:txBody>
+                    <a:bodyPr/>
+                    <a:lstStyle/>
+                    <a:p>
+                      <a:pPr>
+                        <a:defRPr sz="1200" b="1">
+                          <a:solidFill>
+                            <a:srgbClr val="FFFFFF"/>
+                          </a:solidFill>
+                        </a:defRPr>
+                      </a:pPr>
+                      <a:r>
+                        <a:t>MANIQA</a:t>
+                      </a:r>
+                    </a:p>
+                  </a:txBody>
+                  <a:tcPr marT="45720" marB="45720">
+                    <a:solidFill>
+                      <a:srgbClr val="1F4E79"/>
+                    </a:solidFill>
+                  </a:tcPr>
+                </a:tc>
+              </a:tr>
+              <a:tr h="384048">
+                <a:tc>
+                  <a:txBody>
+                    <a:bodyPr/>
+                    <a:lstStyle/>
+                    <a:p>
+                      <a:pPr>
+                        <a:defRPr sz="1200" b="0">
+                          <a:solidFill>
+                            <a:srgbClr val="222222"/>
+                          </a:solidFill>
+                        </a:defRPr>
+                      </a:pPr>
+                      <a:r>
+                        <a:t>Bicubic</a:t>
+                      </a:r>
+                    </a:p>
+                  </a:txBody>
+                  <a:tcPr>
+                    <a:solidFill>
+                      <a:srgbClr val="FFFFFF"/>
+                    </a:solidFill>
+                  </a:tcPr>
+                </a:tc>
+                <a:tc>
+                  <a:txBody>
+                    <a:bodyPr/>
+                    <a:lstStyle/>
+                    <a:p>
+                      <a:pPr>
+                        <a:defRPr sz="1200" b="0">
+                          <a:solidFill>
+                            <a:srgbClr val="222222"/>
+                          </a:solidFill>
+                        </a:defRPr>
+                      </a:pPr>
+                      <a:r>
+                        <a:t>floor</a:t>
+                      </a:r>
+                    </a:p>
+                  </a:txBody>
+                  <a:tcPr>
+                    <a:solidFill>
+                      <a:srgbClr val="FFFFFF"/>
+                    </a:solidFill>
+                  </a:tcPr>
+                </a:tc>
+                <a:tc>
+                  <a:txBody>
+                    <a:bodyPr/>
+                    <a:lstStyle/>
+                    <a:p>
+                      <a:pPr>
+                        <a:defRPr sz="1200" b="0">
+                          <a:solidFill>
+                            <a:srgbClr val="222222"/>
+                          </a:solidFill>
+                        </a:defRPr>
+                      </a:pPr>
+                      <a:r>
+                        <a:t>—</a:t>
+                      </a:r>
+                    </a:p>
+                  </a:txBody>
+                  <a:tcPr>
+                    <a:solidFill>
+                      <a:srgbClr val="FFFFFF"/>
+                    </a:solidFill>
+                  </a:tcPr>
+                </a:tc>
+                <a:tc>
+                  <a:txBody>
+                    <a:bodyPr/>
+                    <a:lstStyle/>
+                    <a:p>
+                      <a:pPr>
+                        <a:defRPr sz="1200" b="0">
+                          <a:solidFill>
+                            <a:srgbClr val="222222"/>
+                          </a:solidFill>
+                        </a:defRPr>
+                      </a:pPr>
+                      <a:r>
+                        <a:t>31.73</a:t>
+                      </a:r>
+                    </a:p>
+                  </a:txBody>
+                  <a:tcPr>
+                    <a:solidFill>
+                      <a:srgbClr val="FFFFFF"/>
+                    </a:solidFill>
+                  </a:tcPr>
+                </a:tc>
+                <a:tc>
+                  <a:txBody>
+                    <a:bodyPr/>
+                    <a:lstStyle/>
+                    <a:p>
+                      <a:pPr>
+                        <a:defRPr sz="1200" b="0">
+                          <a:solidFill>
+                            <a:srgbClr val="222222"/>
+                          </a:solidFill>
+                        </a:defRPr>
+                      </a:pPr>
+                      <a:r>
+                        <a:t>0.8876</a:t>
+                      </a:r>
+                    </a:p>
+                  </a:txBody>
+                  <a:tcPr>
+                    <a:solidFill>
+                      <a:srgbClr val="FFFFFF"/>
+                    </a:solidFill>
+                  </a:tcPr>
+                </a:tc>
+                <a:tc>
+                  <a:txBody>
+                    <a:bodyPr/>
+                    <a:lstStyle/>
+                    <a:p>
+                      <a:pPr>
+                        <a:defRPr sz="1200" b="0">
+                          <a:solidFill>
+                            <a:srgbClr val="222222"/>
+                          </a:solidFill>
+                        </a:defRPr>
+                      </a:pPr>
+                      <a:r>
+                        <a:t>39.40</a:t>
+                      </a:r>
+                    </a:p>
+                  </a:txBody>
+                  <a:tcPr>
+                    <a:solidFill>
+                      <a:srgbClr val="FFFFFF"/>
+                    </a:solidFill>
+                  </a:tcPr>
+                </a:tc>
+                <a:tc>
+                  <a:txBody>
+                    <a:bodyPr/>
+                    <a:lstStyle/>
+                    <a:p>
+                      <a:pPr>
+                        <a:defRPr sz="1200" b="0">
+                          <a:solidFill>
+                            <a:srgbClr val="222222"/>
+                          </a:solidFill>
+                        </a:defRPr>
+                      </a:pPr>
+                      <a:r>
+                        <a:t>0.278</a:t>
+                      </a:r>
+                    </a:p>
+                  </a:txBody>
+                  <a:tcPr>
+                    <a:solidFill>
+                      <a:srgbClr val="FFFFFF"/>
+                    </a:solidFill>
+                  </a:tcPr>
+                </a:tc>
+              </a:tr>
+              <a:tr h="384048">
+                <a:tc>
+                  <a:txBody>
+                    <a:bodyPr/>
+                    <a:lstStyle/>
+                    <a:p>
+                      <a:pPr>
+                        <a:defRPr sz="1200" b="0">
+                          <a:solidFill>
+                            <a:srgbClr val="222222"/>
+                          </a:solidFill>
+                        </a:defRPr>
+                      </a:pPr>
+                      <a:r>
+                        <a:t>SwinIR-light (re-trained)</a:t>
+                      </a:r>
+                    </a:p>
+                  </a:txBody>
+                  <a:tcPr>
+                    <a:solidFill>
+                      <a:srgbClr val="EEF2F7"/>
+                    </a:solidFill>
+                  </a:tcPr>
+                </a:tc>
+                <a:tc>
+                  <a:txBody>
+                    <a:bodyPr/>
+                    <a:lstStyle/>
+                    <a:p>
+                      <a:pPr>
+                        <a:defRPr sz="1200" b="0">
+                          <a:solidFill>
+                            <a:srgbClr val="222222"/>
+                          </a:solidFill>
+                        </a:defRPr>
+                      </a:pPr>
+                      <a:r>
+                        <a:t>Transformer</a:t>
+                      </a:r>
+                    </a:p>
+                  </a:txBody>
+                  <a:tcPr>
+                    <a:solidFill>
+                      <a:srgbClr val="EEF2F7"/>
+                    </a:solidFill>
+                  </a:tcPr>
+                </a:tc>
+                <a:tc>
+                  <a:txBody>
+                    <a:bodyPr/>
+                    <a:lstStyle/>
+                    <a:p>
+                      <a:pPr>
+                        <a:defRPr sz="1200" b="0">
+                          <a:solidFill>
+                            <a:srgbClr val="222222"/>
+                          </a:solidFill>
+                        </a:defRPr>
+                      </a:pPr>
+                      <a:r>
+                        <a:t>0.61M</a:t>
+                      </a:r>
+                    </a:p>
+                  </a:txBody>
+                  <a:tcPr>
+                    <a:solidFill>
+                      <a:srgbClr val="EEF2F7"/>
+                    </a:solidFill>
+                  </a:tcPr>
+                </a:tc>
+                <a:tc>
+                  <a:txBody>
+                    <a:bodyPr/>
+                    <a:lstStyle/>
+                    <a:p>
+                      <a:pPr>
+                        <a:defRPr sz="1200" b="0">
+                          <a:solidFill>
+                            <a:srgbClr val="222222"/>
+                          </a:solidFill>
+                        </a:defRPr>
+                      </a:pPr>
+                      <a:r>
+                        <a:t>32.88</a:t>
+                      </a:r>
+                    </a:p>
+                  </a:txBody>
+                  <a:tcPr>
+                    <a:solidFill>
+                      <a:srgbClr val="EEF2F7"/>
+                    </a:solidFill>
+                  </a:tcPr>
+                </a:tc>
+                <a:tc>
+                  <a:txBody>
+                    <a:bodyPr/>
+                    <a:lstStyle/>
+                    <a:p>
+                      <a:pPr>
+                        <a:defRPr sz="1200" b="0">
+                          <a:solidFill>
+                            <a:srgbClr val="222222"/>
+                          </a:solidFill>
+                        </a:defRPr>
+                      </a:pPr>
+                      <a:r>
+                        <a:t>0.9026</a:t>
+                      </a:r>
+                    </a:p>
+                  </a:txBody>
+                  <a:tcPr>
+                    <a:solidFill>
+                      <a:srgbClr val="EEF2F7"/>
+                    </a:solidFill>
+                  </a:tcPr>
+                </a:tc>
+                <a:tc>
+                  <a:txBody>
+                    <a:bodyPr/>
+                    <a:lstStyle/>
+                    <a:p>
+                      <a:pPr>
+                        <a:defRPr sz="1200" b="0">
+                          <a:solidFill>
+                            <a:srgbClr val="222222"/>
+                          </a:solidFill>
+                        </a:defRPr>
+                      </a:pPr>
+                      <a:r>
+                        <a:t>45.43</a:t>
+                      </a:r>
+                    </a:p>
+                  </a:txBody>
+                  <a:tcPr>
+                    <a:solidFill>
+                      <a:srgbClr val="EEF2F7"/>
+                    </a:solidFill>
+                  </a:tcPr>
+                </a:tc>
+                <a:tc>
+                  <a:txBody>
+                    <a:bodyPr/>
+                    <a:lstStyle/>
+                    <a:p>
+                      <a:pPr>
+                        <a:defRPr sz="1200" b="0">
+                          <a:solidFill>
+                            <a:srgbClr val="222222"/>
+                          </a:solidFill>
+                        </a:defRPr>
+                      </a:pPr>
+                      <a:r>
+                        <a:t>0.302</a:t>
+                      </a:r>
+                    </a:p>
+                  </a:txBody>
+                  <a:tcPr>
+                    <a:solidFill>
+                      <a:srgbClr val="EEF2F7"/>
+                    </a:solidFill>
+                  </a:tcPr>
+                </a:tc>
+              </a:tr>
+              <a:tr h="384048">
+                <a:tc>
+                  <a:txBody>
+                    <a:bodyPr/>
+                    <a:lstStyle/>
+                    <a:p>
+                      <a:pPr>
+                        <a:defRPr sz="1200" b="0">
+                          <a:solidFill>
+                            <a:srgbClr val="222222"/>
+                          </a:solidFill>
+                        </a:defRPr>
+                      </a:pPr>
+                      <a:r>
+                        <a:t>SwinIR-largeish (re-trained)</a:t>
+                      </a:r>
+                    </a:p>
+                  </a:txBody>
+                  <a:tcPr>
+                    <a:solidFill>
+                      <a:srgbClr val="FFFFFF"/>
+                    </a:solidFill>
+                  </a:tcPr>
+                </a:tc>
+                <a:tc>
+                  <a:txBody>
+                    <a:bodyPr/>
+                    <a:lstStyle/>
+                    <a:p>
+                      <a:pPr>
+                        <a:defRPr sz="1200" b="0">
+                          <a:solidFill>
+                            <a:srgbClr val="222222"/>
+                          </a:solidFill>
+                        </a:defRPr>
+                      </a:pPr>
+                      <a:r>
+                        <a:t>Transformer</a:t>
+                      </a:r>
+                    </a:p>
+                  </a:txBody>
+                  <a:tcPr>
+                    <a:solidFill>
+                      <a:srgbClr val="FFFFFF"/>
+                    </a:solidFill>
+                  </a:tcPr>
+                </a:tc>
+                <a:tc>
+                  <a:txBody>
+                    <a:bodyPr/>
+                    <a:lstStyle/>
+                    <a:p>
+                      <a:pPr>
+                        <a:defRPr sz="1200" b="0">
+                          <a:solidFill>
+                            <a:srgbClr val="222222"/>
+                          </a:solidFill>
+                        </a:defRPr>
+                      </a:pPr>
+                      <a:r>
+                        <a:t>3.96M</a:t>
+                      </a:r>
+                    </a:p>
+                  </a:txBody>
+                  <a:tcPr>
+                    <a:solidFill>
+                      <a:srgbClr val="FFFFFF"/>
+                    </a:solidFill>
+                  </a:tcPr>
+                </a:tc>
+                <a:tc>
+                  <a:txBody>
+                    <a:bodyPr/>
+                    <a:lstStyle/>
+                    <a:p>
+                      <a:pPr>
+                        <a:defRPr sz="1200" b="0">
+                          <a:solidFill>
+                            <a:srgbClr val="222222"/>
+                          </a:solidFill>
+                        </a:defRPr>
+                      </a:pPr>
+                      <a:r>
+                        <a:t>32.97</a:t>
+                      </a:r>
+                    </a:p>
+                  </a:txBody>
+                  <a:tcPr>
+                    <a:solidFill>
+                      <a:srgbClr val="FFFFFF"/>
+                    </a:solidFill>
+                  </a:tcPr>
+                </a:tc>
+                <a:tc>
+                  <a:txBody>
+                    <a:bodyPr/>
+                    <a:lstStyle/>
+                    <a:p>
+                      <a:pPr>
+                        <a:defRPr sz="1200" b="0">
+                          <a:solidFill>
+                            <a:srgbClr val="222222"/>
+                          </a:solidFill>
+                        </a:defRPr>
+                      </a:pPr>
+                      <a:r>
+                        <a:t>0.9058</a:t>
+                      </a:r>
+                    </a:p>
+                  </a:txBody>
+                  <a:tcPr>
+                    <a:solidFill>
+                      <a:srgbClr val="FFFFFF"/>
+                    </a:solidFill>
+                  </a:tcPr>
+                </a:tc>
+                <a:tc>
+                  <a:txBody>
+                    <a:bodyPr/>
+                    <a:lstStyle/>
+                    <a:p>
+                      <a:pPr>
+                        <a:defRPr sz="1200" b="0">
+                          <a:solidFill>
+                            <a:srgbClr val="222222"/>
+                          </a:solidFill>
+                        </a:defRPr>
+                      </a:pPr>
+                      <a:r>
+                        <a:t>46.79</a:t>
+                      </a:r>
+                    </a:p>
+                  </a:txBody>
+                  <a:tcPr>
+                    <a:solidFill>
+                      <a:srgbClr val="FFFFFF"/>
+                    </a:solidFill>
+                  </a:tcPr>
+                </a:tc>
+                <a:tc>
+                  <a:txBody>
+                    <a:bodyPr/>
+                    <a:lstStyle/>
+                    <a:p>
+                      <a:pPr>
+                        <a:defRPr sz="1200" b="0">
+                          <a:solidFill>
+                            <a:srgbClr val="222222"/>
+                          </a:solidFill>
+                        </a:defRPr>
+                      </a:pPr>
+                      <a:r>
+                        <a:t>0.305</a:t>
+                      </a:r>
+                    </a:p>
+                  </a:txBody>
+                  <a:tcPr>
+                    <a:solidFill>
+                      <a:srgbClr val="FFFFFF"/>
+                    </a:solidFill>
+                  </a:tcPr>
+                </a:tc>
+              </a:tr>
+              <a:tr h="384048">
+                <a:tc>
+                  <a:txBody>
+                    <a:bodyPr/>
+                    <a:lstStyle/>
+                    <a:p>
+                      <a:pPr>
+                        <a:defRPr sz="1200" b="0">
+                          <a:solidFill>
+                            <a:srgbClr val="222222"/>
+                          </a:solidFill>
+                        </a:defRPr>
+                      </a:pPr>
+                      <a:r>
+                        <a:t>E11 Mod-SwinIR (Align-L1)</a:t>
+                      </a:r>
+                    </a:p>
+                  </a:txBody>
+                  <a:tcPr>
+                    <a:solidFill>
+                      <a:srgbClr val="EEF2F7"/>
+                    </a:solidFill>
+                  </a:tcPr>
+                </a:tc>
+                <a:tc>
+                  <a:txBody>
+                    <a:bodyPr/>
+                    <a:lstStyle/>
+                    <a:p>
+                      <a:pPr>
+                        <a:defRPr sz="1200" b="0">
+                          <a:solidFill>
+                            <a:srgbClr val="222222"/>
+                          </a:solidFill>
+                        </a:defRPr>
+                      </a:pPr>
+                      <a:r>
+                        <a:t>Transformer</a:t>
+                      </a:r>
+                    </a:p>
+                  </a:txBody>
+                  <a:tcPr>
+                    <a:solidFill>
+                      <a:srgbClr val="EEF2F7"/>
+                    </a:solidFill>
+                  </a:tcPr>
+                </a:tc>
+                <a:tc>
+                  <a:txBody>
+                    <a:bodyPr/>
+                    <a:lstStyle/>
+                    <a:p>
+                      <a:pPr>
+                        <a:defRPr sz="1200" b="0">
+                          <a:solidFill>
+                            <a:srgbClr val="222222"/>
+                          </a:solidFill>
+                        </a:defRPr>
+                      </a:pPr>
+                      <a:r>
+                        <a:t>4.05M</a:t>
+                      </a:r>
+                    </a:p>
+                  </a:txBody>
+                  <a:tcPr>
+                    <a:solidFill>
+                      <a:srgbClr val="EEF2F7"/>
+                    </a:solidFill>
+                  </a:tcPr>
+                </a:tc>
+                <a:tc>
+                  <a:txBody>
+                    <a:bodyPr/>
+                    <a:lstStyle/>
+                    <a:p>
+                      <a:pPr>
+                        <a:defRPr sz="1200" b="0">
+                          <a:solidFill>
+                            <a:srgbClr val="222222"/>
+                          </a:solidFill>
+                        </a:defRPr>
+                      </a:pPr>
+                      <a:r>
+                        <a:t>33.47</a:t>
+                      </a:r>
+                    </a:p>
+                  </a:txBody>
+                  <a:tcPr>
+                    <a:solidFill>
+                      <a:srgbClr val="EEF2F7"/>
+                    </a:solidFill>
+                  </a:tcPr>
+                </a:tc>
+                <a:tc>
+                  <a:txBody>
+                    <a:bodyPr/>
+                    <a:lstStyle/>
+                    <a:p>
+                      <a:pPr>
+                        <a:defRPr sz="1200" b="0">
+                          <a:solidFill>
+                            <a:srgbClr val="222222"/>
+                          </a:solidFill>
+                        </a:defRPr>
+                      </a:pPr>
+                      <a:r>
+                        <a:t>0.9143</a:t>
+                      </a:r>
+                    </a:p>
+                  </a:txBody>
+                  <a:tcPr>
+                    <a:solidFill>
+                      <a:srgbClr val="EEF2F7"/>
+                    </a:solidFill>
+                  </a:tcPr>
+                </a:tc>
+                <a:tc>
+                  <a:txBody>
+                    <a:bodyPr/>
+                    <a:lstStyle/>
+                    <a:p>
+                      <a:pPr>
+                        <a:defRPr sz="1200" b="0">
+                          <a:solidFill>
+                            <a:srgbClr val="222222"/>
+                          </a:solidFill>
+                        </a:defRPr>
+                      </a:pPr>
+                      <a:r>
+                        <a:t>49.15</a:t>
+                      </a:r>
+                    </a:p>
+                  </a:txBody>
+                  <a:tcPr>
+                    <a:solidFill>
+                      <a:srgbClr val="EEF2F7"/>
+                    </a:solidFill>
+                  </a:tcPr>
+                </a:tc>
+                <a:tc>
+                  <a:txBody>
+                    <a:bodyPr/>
+                    <a:lstStyle/>
+                    <a:p>
+                      <a:pPr>
+                        <a:defRPr sz="1200" b="0">
+                          <a:solidFill>
+                            <a:srgbClr val="222222"/>
+                          </a:solidFill>
+                        </a:defRPr>
+                      </a:pPr>
+                      <a:r>
+                        <a:t>0.309</a:t>
+                      </a:r>
+                    </a:p>
+                  </a:txBody>
+                  <a:tcPr>
+                    <a:solidFill>
+                      <a:srgbClr val="EEF2F7"/>
+                    </a:solidFill>
+                  </a:tcPr>
+                </a:tc>
+              </a:tr>
+              <a:tr h="384048">
+                <a:tc>
+                  <a:txBody>
+                    <a:bodyPr/>
+                    <a:lstStyle/>
+                    <a:p>
+                      <a:pPr>
+                        <a:defRPr sz="1200" b="0">
+                          <a:solidFill>
+                            <a:srgbClr val="222222"/>
+                          </a:solidFill>
+                        </a:defRPr>
+                      </a:pPr>
+                      <a:r>
+                        <a:t>EDSR-baseline (repro.)</a:t>
+                      </a:r>
+                    </a:p>
+                  </a:txBody>
+                  <a:tcPr>
+                    <a:solidFill>
+                      <a:srgbClr val="FFFFFF"/>
+                    </a:solidFill>
+                  </a:tcPr>
+                </a:tc>
+                <a:tc>
+                  <a:txBody>
+                    <a:bodyPr/>
+                    <a:lstStyle/>
+                    <a:p>
+                      <a:pPr>
+                        <a:defRPr sz="1200" b="0">
+                          <a:solidFill>
+                            <a:srgbClr val="222222"/>
+                          </a:solidFill>
+                        </a:defRPr>
+                      </a:pPr>
+                      <a:r>
+                        <a:t>CNN</a:t>
+                      </a:r>
+                    </a:p>
+                  </a:txBody>
+                  <a:tcPr>
+                    <a:solidFill>
+                      <a:srgbClr val="FFFFFF"/>
+                    </a:solidFill>
+                  </a:tcPr>
+                </a:tc>
+                <a:tc>
+                  <a:txBody>
+                    <a:bodyPr/>
+                    <a:lstStyle/>
+                    <a:p>
+                      <a:pPr>
+                        <a:defRPr sz="1200" b="0">
+                          <a:solidFill>
+                            <a:srgbClr val="222222"/>
+                          </a:solidFill>
+                        </a:defRPr>
+                      </a:pPr>
+                      <a:r>
+                        <a:t>1.19M</a:t>
+                      </a:r>
+                    </a:p>
+                  </a:txBody>
+                  <a:tcPr>
+                    <a:solidFill>
+                      <a:srgbClr val="FFFFFF"/>
+                    </a:solidFill>
+                  </a:tcPr>
+                </a:tc>
+                <a:tc>
+                  <a:txBody>
+                    <a:bodyPr/>
+                    <a:lstStyle/>
+                    <a:p>
+                      <a:pPr>
+                        <a:defRPr sz="1200" b="0">
+                          <a:solidFill>
+                            <a:srgbClr val="222222"/>
+                          </a:solidFill>
+                        </a:defRPr>
+                      </a:pPr>
+                      <a:r>
+                        <a:t>33.60</a:t>
+                      </a:r>
+                    </a:p>
+                  </a:txBody>
+                  <a:tcPr>
+                    <a:solidFill>
+                      <a:srgbClr val="FFFFFF"/>
+                    </a:solidFill>
+                  </a:tcPr>
+                </a:tc>
+                <a:tc>
+                  <a:txBody>
+                    <a:bodyPr/>
+                    <a:lstStyle/>
+                    <a:p>
+                      <a:pPr>
+                        <a:defRPr sz="1200" b="0">
+                          <a:solidFill>
+                            <a:srgbClr val="222222"/>
+                          </a:solidFill>
+                        </a:defRPr>
+                      </a:pPr>
+                      <a:r>
+                        <a:t>0.9167</a:t>
+                      </a:r>
+                    </a:p>
+                  </a:txBody>
+                  <a:tcPr>
+                    <a:solidFill>
+                      <a:srgbClr val="FFFFFF"/>
+                    </a:solidFill>
+                  </a:tcPr>
+                </a:tc>
+                <a:tc>
+                  <a:txBody>
+                    <a:bodyPr/>
+                    <a:lstStyle/>
+                    <a:p>
+                      <a:pPr>
+                        <a:defRPr sz="1200" b="0">
+                          <a:solidFill>
+                            <a:srgbClr val="222222"/>
+                          </a:solidFill>
+                        </a:defRPr>
+                      </a:pPr>
+                      <a:r>
+                        <a:t>53.14</a:t>
+                      </a:r>
+                    </a:p>
+                  </a:txBody>
+                  <a:tcPr>
+                    <a:solidFill>
+                      <a:srgbClr val="FFFFFF"/>
+                    </a:solidFill>
+                  </a:tcPr>
+                </a:tc>
+                <a:tc>
+                  <a:txBody>
+                    <a:bodyPr/>
+                    <a:lstStyle/>
+                    <a:p>
+                      <a:pPr>
+                        <a:defRPr sz="1200" b="0">
+                          <a:solidFill>
+                            <a:srgbClr val="222222"/>
+                          </a:solidFill>
+                        </a:defRPr>
+                      </a:pPr>
+                      <a:r>
+                        <a:t>0.327</a:t>
+                      </a:r>
+                    </a:p>
+                  </a:txBody>
+                  <a:tcPr>
+                    <a:solidFill>
+                      <a:srgbClr val="FFFFFF"/>
+                    </a:solidFill>
+                  </a:tcPr>
+                </a:tc>
+              </a:tr>
+              <a:tr h="384048">
+                <a:tc>
+                  <a:txBody>
+                    <a:bodyPr/>
+                    <a:lstStyle/>
+                    <a:p>
+                      <a:pPr>
+                        <a:defRPr sz="1200" b="0">
+                          <a:solidFill>
+                            <a:srgbClr val="222222"/>
+                          </a:solidFill>
+                        </a:defRPr>
+                      </a:pPr>
+                      <a:r>
+                        <a:t>s1_b64 (AdamW, zero-pretrain)</a:t>
+                      </a:r>
+                    </a:p>
+                  </a:txBody>
+                  <a:tcPr>
+                    <a:solidFill>
+                      <a:srgbClr val="EEF2F7"/>
+                    </a:solidFill>
+                  </a:tcPr>
+                </a:tc>
+                <a:tc>
+                  <a:txBody>
+                    <a:bodyPr/>
+                    <a:lstStyle/>
+                    <a:p>
+                      <a:pPr>
+                        <a:defRPr sz="1200" b="0">
+                          <a:solidFill>
+                            <a:srgbClr val="222222"/>
+                          </a:solidFill>
+                        </a:defRPr>
+                      </a:pPr>
+                      <a:r>
+                        <a:t>U-Net</a:t>
+                      </a:r>
+                    </a:p>
+                  </a:txBody>
+                  <a:tcPr>
+                    <a:solidFill>
+                      <a:srgbClr val="EEF2F7"/>
+                    </a:solidFill>
+                  </a:tcPr>
+                </a:tc>
+                <a:tc>
+                  <a:txBody>
+                    <a:bodyPr/>
+                    <a:lstStyle/>
+                    <a:p>
+                      <a:pPr>
+                        <a:defRPr sz="1200" b="0">
+                          <a:solidFill>
+                            <a:srgbClr val="222222"/>
+                          </a:solidFill>
+                        </a:defRPr>
+                      </a:pPr>
+                      <a:r>
+                        <a:t>18.7M</a:t>
+                      </a:r>
+                    </a:p>
+                  </a:txBody>
+                  <a:tcPr>
+                    <a:solidFill>
+                      <a:srgbClr val="EEF2F7"/>
+                    </a:solidFill>
+                  </a:tcPr>
+                </a:tc>
+                <a:tc>
+                  <a:txBody>
+                    <a:bodyPr/>
+                    <a:lstStyle/>
+                    <a:p>
+                      <a:pPr>
+                        <a:defRPr sz="1200" b="0">
+                          <a:solidFill>
+                            <a:srgbClr val="222222"/>
+                          </a:solidFill>
+                        </a:defRPr>
+                      </a:pPr>
+                      <a:r>
+                        <a:t>34.11</a:t>
+                      </a:r>
+                    </a:p>
+                  </a:txBody>
+                  <a:tcPr>
+                    <a:solidFill>
+                      <a:srgbClr val="EEF2F7"/>
+                    </a:solidFill>
+                  </a:tcPr>
+                </a:tc>
+                <a:tc>
+                  <a:txBody>
+                    <a:bodyPr/>
+                    <a:lstStyle/>
+                    <a:p>
+                      <a:pPr>
+                        <a:defRPr sz="1200" b="0">
+                          <a:solidFill>
+                            <a:srgbClr val="222222"/>
+                          </a:solidFill>
+                        </a:defRPr>
+                      </a:pPr>
+                      <a:r>
+                        <a:t>0.9246</a:t>
+                      </a:r>
+                    </a:p>
+                  </a:txBody>
+                  <a:tcPr>
+                    <a:solidFill>
+                      <a:srgbClr val="EEF2F7"/>
+                    </a:solidFill>
+                  </a:tcPr>
+                </a:tc>
+                <a:tc>
+                  <a:txBody>
+                    <a:bodyPr/>
+                    <a:lstStyle/>
+                    <a:p>
+                      <a:pPr>
+                        <a:defRPr sz="1200" b="0">
+                          <a:solidFill>
+                            <a:srgbClr val="222222"/>
+                          </a:solidFill>
+                        </a:defRPr>
+                      </a:pPr>
+                      <a:r>
+                        <a:t>55.22</a:t>
+                      </a:r>
+                    </a:p>
+                  </a:txBody>
+                  <a:tcPr>
+                    <a:solidFill>
+                      <a:srgbClr val="EEF2F7"/>
+                    </a:solidFill>
+                  </a:tcPr>
+                </a:tc>
+                <a:tc>
+                  <a:txBody>
+                    <a:bodyPr/>
+                    <a:lstStyle/>
+                    <a:p>
+                      <a:pPr>
+                        <a:defRPr sz="1200" b="0">
+                          <a:solidFill>
+                            <a:srgbClr val="222222"/>
+                          </a:solidFill>
+                        </a:defRPr>
+                      </a:pPr>
+                      <a:r>
+                        <a:t>0.342</a:t>
+                      </a:r>
+                    </a:p>
+                  </a:txBody>
+                  <a:tcPr>
+                    <a:solidFill>
+                      <a:srgbClr val="EEF2F7"/>
+                    </a:solidFill>
+                  </a:tcPr>
+                </a:tc>
+              </a:tr>
+              <a:tr h="384048">
+                <a:tc>
+                  <a:txBody>
+                    <a:bodyPr/>
+                    <a:lstStyle/>
+                    <a:p>
+                      <a:pPr>
+                        <a:defRPr sz="1200" b="0">
+                          <a:solidFill>
+                            <a:srgbClr val="222222"/>
+                          </a:solidFill>
+                        </a:defRPr>
+                      </a:pPr>
+                      <a:r>
+                        <a:t>latent rectified-flow (ours)</a:t>
+                      </a:r>
+                    </a:p>
+                  </a:txBody>
+                  <a:tcPr>
+                    <a:solidFill>
+                      <a:srgbClr val="FFFFFF"/>
+                    </a:solidFill>
+                  </a:tcPr>
+                </a:tc>
+                <a:tc>
+                  <a:txBody>
+                    <a:bodyPr/>
+                    <a:lstStyle/>
+                    <a:p>
+                      <a:pPr>
+                        <a:defRPr sz="1200" b="0">
+                          <a:solidFill>
+                            <a:srgbClr val="222222"/>
+                          </a:solidFill>
+                        </a:defRPr>
+                      </a:pPr>
+                      <a:r>
+                        <a:t>Generative</a:t>
+                      </a:r>
+                    </a:p>
+                  </a:txBody>
+                  <a:tcPr>
+                    <a:solidFill>
+                      <a:srgbClr val="FFFFFF"/>
+                    </a:solidFill>
+                  </a:tcPr>
+                </a:tc>
+                <a:tc>
+                  <a:txBody>
+                    <a:bodyPr/>
+                    <a:lstStyle/>
+                    <a:p>
+                      <a:pPr>
+                        <a:defRPr sz="1200" b="0">
+                          <a:solidFill>
+                            <a:srgbClr val="222222"/>
+                          </a:solidFill>
+                        </a:defRPr>
+                      </a:pPr>
+                      <a:r>
+                        <a:t>32.9M</a:t>
+                      </a:r>
+                    </a:p>
+                  </a:txBody>
+                  <a:tcPr>
+                    <a:solidFill>
+                      <a:srgbClr val="FFFFFF"/>
+                    </a:solidFill>
+                  </a:tcPr>
+                </a:tc>
+                <a:tc>
+                  <a:txBody>
+                    <a:bodyPr/>
+                    <a:lstStyle/>
+                    <a:p>
+                      <a:pPr>
+                        <a:defRPr sz="1200" b="0">
+                          <a:solidFill>
+                            <a:srgbClr val="222222"/>
+                          </a:solidFill>
+                        </a:defRPr>
+                      </a:pPr>
+                      <a:r>
+                        <a:t>28.36</a:t>
+                      </a:r>
+                    </a:p>
+                  </a:txBody>
+                  <a:tcPr>
+                    <a:solidFill>
+                      <a:srgbClr val="FFFFFF"/>
+                    </a:solidFill>
+                  </a:tcPr>
+                </a:tc>
+                <a:tc>
+                  <a:txBody>
+                    <a:bodyPr/>
+                    <a:lstStyle/>
+                    <a:p>
+                      <a:pPr>
+                        <a:defRPr sz="1200" b="0">
+                          <a:solidFill>
+                            <a:srgbClr val="222222"/>
+                          </a:solidFill>
+                        </a:defRPr>
+                      </a:pPr>
+                      <a:r>
+                        <a:t>0.790</a:t>
+                      </a:r>
+                    </a:p>
+                  </a:txBody>
+                  <a:tcPr>
+                    <a:solidFill>
+                      <a:srgbClr val="FFFFFF"/>
+                    </a:solidFill>
+                  </a:tcPr>
+                </a:tc>
+                <a:tc>
+                  <a:txBody>
+                    <a:bodyPr/>
+                    <a:lstStyle/>
+                    <a:p>
+                      <a:pPr>
+                        <a:defRPr sz="1200" b="0">
+                          <a:solidFill>
+                            <a:srgbClr val="222222"/>
+                          </a:solidFill>
+                        </a:defRPr>
+                      </a:pPr>
+                      <a:r>
+                        <a:t>50.12</a:t>
+                      </a:r>
+                    </a:p>
+                  </a:txBody>
+                  <a:tcPr>
+                    <a:solidFill>
+                      <a:srgbClr val="FFFFFF"/>
+                    </a:solidFill>
+                  </a:tcPr>
+                </a:tc>
+                <a:tc>
+                  <a:txBody>
+                    <a:bodyPr/>
+                    <a:lstStyle/>
+                    <a:p>
+                      <a:pPr>
+                        <a:defRPr sz="1200" b="0">
+                          <a:solidFill>
+                            <a:srgbClr val="222222"/>
+                          </a:solidFill>
+                        </a:defRPr>
+                      </a:pPr>
+                      <a:r>
+                        <a:t>0.224</a:t>
+                      </a:r>
+                    </a:p>
+                  </a:txBody>
+                  <a:tcPr>
+                    <a:solidFill>
+                      <a:srgbClr val="FFFFFF"/>
+                    </a:solidFill>
+                  </a:tcPr>
+                </a:tc>
+              </a:tr>
+              <a:tr h="384048">
+                <a:tc>
+                  <a:txBody>
+                    <a:bodyPr/>
+                    <a:lstStyle/>
+                    <a:p>
+                      <a:pPr>
+                        <a:defRPr sz="1200" b="1">
+                          <a:solidFill>
+                            <a:srgbClr val="222222"/>
+                          </a:solidFill>
+                        </a:defRPr>
+                      </a:pPr>
+                      <a:r>
+                        <a:t>Ours (full recipe + TTA)</a:t>
+                      </a:r>
+                    </a:p>
+                  </a:txBody>
+                  <a:tcPr>
+                    <a:solidFill>
+                      <a:srgbClr val="FBE5A7"/>
+                    </a:solidFill>
+                  </a:tcPr>
+                </a:tc>
+                <a:tc>
+                  <a:txBody>
+                    <a:bodyPr/>
+                    <a:lstStyle/>
+                    <a:p>
+                      <a:pPr>
+                        <a:defRPr sz="1200" b="1">
+                          <a:solidFill>
+                            <a:srgbClr val="222222"/>
+                          </a:solidFill>
+                        </a:defRPr>
+                      </a:pPr>
+                      <a:r>
+                        <a:t>U-Net stride-1</a:t>
+                      </a:r>
+                    </a:p>
+                  </a:txBody>
+                  <a:tcPr>
+                    <a:solidFill>
+                      <a:srgbClr val="FBE5A7"/>
+                    </a:solidFill>
+                  </a:tcPr>
+                </a:tc>
+                <a:tc>
+                  <a:txBody>
+                    <a:bodyPr/>
+                    <a:lstStyle/>
+                    <a:p>
+                      <a:pPr>
+                        <a:defRPr sz="1200" b="1">
+                          <a:solidFill>
+                            <a:srgbClr val="222222"/>
+                          </a:solidFill>
+                        </a:defRPr>
+                      </a:pPr>
+                      <a:r>
+                        <a:t>18.7M</a:t>
+                      </a:r>
+                    </a:p>
+                  </a:txBody>
+                  <a:tcPr>
+                    <a:solidFill>
+                      <a:srgbClr val="FBE5A7"/>
+                    </a:solidFill>
+                  </a:tcPr>
+                </a:tc>
+                <a:tc>
+                  <a:txBody>
+                    <a:bodyPr/>
+                    <a:lstStyle/>
+                    <a:p>
+                      <a:pPr>
+                        <a:defRPr sz="1200" b="1">
+                          <a:solidFill>
+                            <a:srgbClr val="222222"/>
+                          </a:solidFill>
+                        </a:defRPr>
+                      </a:pPr>
+                      <a:r>
+                        <a:t>34.41</a:t>
+                      </a:r>
+                    </a:p>
+                  </a:txBody>
+                  <a:tcPr>
+                    <a:solidFill>
+                      <a:srgbClr val="FBE5A7"/>
+                    </a:solidFill>
+                  </a:tcPr>
+                </a:tc>
+                <a:tc>
+                  <a:txBody>
+                    <a:bodyPr/>
+                    <a:lstStyle/>
+                    <a:p>
+                      <a:pPr>
+                        <a:defRPr sz="1200" b="1">
+                          <a:solidFill>
+                            <a:srgbClr val="222222"/>
+                          </a:solidFill>
+                        </a:defRPr>
+                      </a:pPr>
+                      <a:r>
+                        <a:t>0.9285</a:t>
+                      </a:r>
+                    </a:p>
+                  </a:txBody>
+                  <a:tcPr>
+                    <a:solidFill>
+                      <a:srgbClr val="FBE5A7"/>
+                    </a:solidFill>
+                  </a:tcPr>
+                </a:tc>
+                <a:tc>
+                  <a:txBody>
+                    <a:bodyPr/>
+                    <a:lstStyle/>
+                    <a:p>
+                      <a:pPr>
+                        <a:defRPr sz="1200" b="1">
+                          <a:solidFill>
+                            <a:srgbClr val="222222"/>
+                          </a:solidFill>
+                        </a:defRPr>
+                      </a:pPr>
+                      <a:r>
+                        <a:t>55.96</a:t>
+                      </a:r>
+                    </a:p>
+                  </a:txBody>
+                  <a:tcPr>
+                    <a:solidFill>
+                      <a:srgbClr val="FBE5A7"/>
+                    </a:solidFill>
+                  </a:tcPr>
+                </a:tc>
+                <a:tc>
+                  <a:txBody>
+                    <a:bodyPr/>
+                    <a:lstStyle/>
+                    <a:p>
+                      <a:pPr>
+                        <a:defRPr sz="1200" b="1">
+                          <a:solidFill>
+                            <a:srgbClr val="222222"/>
+                          </a:solidFill>
+                        </a:defRPr>
+                      </a:pPr>
+                      <a:r>
+                        <a:t>0.3534</a:t>
+                      </a:r>
+                    </a:p>
+                  </a:txBody>
+                  <a:tcPr>
+                    <a:solidFill>
+                      <a:srgbClr val="FBE5A7"/>
+                    </a:solidFill>
+                  </a:tcPr>
+                </a:tc>
+              </a:tr>
+            </a:tbl>
+          </a:graphicData>
+        </a:graphic>
+      </p:graphicFrame>
+      <p:sp>
+        <p:nvSpPr>
+          <p:cNvPr id="4" name="TextBox 3"/>
           <p:cNvSpPr txBox="1"/>
           <p:nvPr/>
         </p:nvSpPr>
         <p:spPr>
           <a:xfrm>
-            <a:off x="457200" y="320040"/>
-            <a:ext cx="11247120" cy="914400"/>
+            <a:off x="457200" y="6419088"/>
+            <a:ext cx="8686800" cy="320040"/>
           </a:xfrm>
           <a:prstGeom prst="rect">
             <a:avLst/>
@@ -3700,28 +5818,28 @@
           <a:lstStyle/>
           <a:p>
             <a:pPr>
-              <a:defRPr sz="3000" b="1">
-                <a:solidFill>
-                  <a:srgbClr val="1F4E79"/>
-                </a:solidFill>
-              </a:defRPr>
-            </a:pPr>
-            <a:r>
-              <a:t>Method</a:t>
-            </a:r>
-          </a:p>
-        </p:txBody>
-      </p:sp>
-      <p:sp>
-        <p:nvSpPr>
-          <p:cNvPr id="3" name="TextBox 2"/>
+              <a:defRPr sz="900">
+                <a:solidFill>
+                  <a:srgbClr val="888888"/>
+                </a:solidFill>
+              </a:defRPr>
+            </a:pPr>
+            <a:r>
+              <a:t>RealSR ×2 · Real-World SR · stride-1 + wavelet-HF + Muon + TTA</a:t>
+            </a:r>
+          </a:p>
+        </p:txBody>
+      </p:sp>
+      <p:sp>
+        <p:nvSpPr>
+          <p:cNvPr id="5" name="TextBox 4"/>
           <p:cNvSpPr txBox="1"/>
           <p:nvPr/>
         </p:nvSpPr>
         <p:spPr>
           <a:xfrm>
-            <a:off x="548640" y="1463040"/>
-            <a:ext cx="11064240" cy="4937760"/>
+            <a:off x="11247120" y="6419088"/>
+            <a:ext cx="822960" cy="320040"/>
           </a:xfrm>
           <a:prstGeom prst="rect">
             <a:avLst/>
@@ -3729,83 +5847,20 @@
           <a:noFill/>
         </p:spPr>
         <p:txBody>
-          <a:bodyPr wrap="square">
+          <a:bodyPr wrap="none">
             <a:spAutoFit/>
           </a:bodyPr>
           <a:lstStyle/>
           <a:p>
-            <a:pPr>
-              <a:spcAft>
-                <a:spcPts val="800"/>
-              </a:spcAft>
-              <a:defRPr sz="1800">
-                <a:solidFill>
-                  <a:srgbClr val="222222"/>
-                </a:solidFill>
-              </a:defRPr>
-            </a:pPr>
-            <a:r>
-              <a:t>Stride-1 U-Net regressor (no lossy downsample) + residual-bicubic, zero-init head → step-0 = bicubic.</a:t>
-            </a:r>
-          </a:p>
-          <a:p>
-            <a:pPr>
-              <a:spcAft>
-                <a:spcPts val="800"/>
-              </a:spcAft>
-              <a:defRPr sz="1800">
-                <a:solidFill>
-                  <a:srgbClr val="222222"/>
-                </a:solidFill>
-              </a:defRPr>
-            </a:pPr>
-            <a:r>
-              <a:t>Wavelet high-frequency loss: multi-scale L1 on orthogonal Haar HL/LH/HH subbands (λ≈8).</a:t>
-            </a:r>
-          </a:p>
-          <a:p>
-            <a:pPr>
-              <a:spcAft>
-                <a:spcPts val="800"/>
-              </a:spcAft>
-              <a:defRPr sz="1800">
-                <a:solidFill>
-                  <a:srgbClr val="222222"/>
-                </a:solidFill>
-              </a:defRPr>
-            </a:pPr>
-            <a:r>
-              <a:t>Shift-ensemble variant (avg over dyadic offsets) ≈ shift-invariance — best perceptual arm.</a:t>
-            </a:r>
-          </a:p>
-          <a:p>
-            <a:pPr>
-              <a:spcAft>
-                <a:spcPts val="800"/>
-              </a:spcAft>
-              <a:defRPr sz="1800">
-                <a:solidFill>
-                  <a:srgbClr val="222222"/>
-                </a:solidFill>
-              </a:defRPr>
-            </a:pPr>
-            <a:r>
-              <a:t>Muon optimizer (Newton–Schulz orthogonalised updates; AdamW on 1-D), lr 5e-3.</a:t>
-            </a:r>
-          </a:p>
-          <a:p>
-            <a:pPr>
-              <a:spcAft>
-                <a:spcPts val="800"/>
-              </a:spcAft>
-              <a:defRPr sz="1800">
-                <a:solidFill>
-                  <a:srgbClr val="222222"/>
-                </a:solidFill>
-              </a:defRPr>
-            </a:pPr>
-            <a:r>
-              <a:t>BSRGAN synthetic-degradation pretraining → RealSR finetune; D4 8-fold TTA at inference.</a:t>
+            <a:pPr algn="r">
+              <a:defRPr sz="1000">
+                <a:solidFill>
+                  <a:srgbClr val="888888"/>
+                </a:solidFill>
+              </a:defRPr>
+            </a:pPr>
+            <a:r>
+              <a:t>2</a:t>
             </a:r>
           </a:p>
         </p:txBody>
@@ -3830,47 +5885,52 @@
       <p:grpSpPr/>
       <p:sp>
         <p:nvSpPr>
-          <p:cNvPr id="2" name="TextBox 1"/>
-          <p:cNvSpPr txBox="1"/>
+          <p:cNvPr id="2" name="Rectangle 1"/>
+          <p:cNvSpPr/>
           <p:nvPr/>
         </p:nvSpPr>
         <p:spPr>
           <a:xfrm>
-            <a:off x="457200" y="320040"/>
-            <a:ext cx="11247120" cy="914400"/>
+            <a:off x="0" y="0"/>
+            <a:ext cx="12191695" cy="1051560"/>
           </a:xfrm>
           <a:prstGeom prst="rect">
             <a:avLst/>
           </a:prstGeom>
-          <a:noFill/>
+          <a:solidFill>
+            <a:srgbClr val="1F4E79"/>
+          </a:solidFill>
+          <a:ln>
+            <a:noFill/>
+          </a:ln>
         </p:spPr>
-        <p:txBody>
-          <a:bodyPr wrap="none">
-            <a:spAutoFit/>
-          </a:bodyPr>
-          <a:lstStyle/>
-          <a:p>
-            <a:pPr>
-              <a:defRPr sz="3000" b="1">
-                <a:solidFill>
-                  <a:srgbClr val="1F4E79"/>
-                </a:solidFill>
-              </a:defRPr>
-            </a:pPr>
-            <a:r>
-              <a:t>Results — official paired protocol (100 pairs)</a:t>
-            </a:r>
-          </a:p>
-          <a:p>
-            <a:pPr>
-              <a:defRPr sz="1400">
-                <a:solidFill>
-                  <a:srgbClr val="606060"/>
-                </a:solidFill>
-              </a:defRPr>
-            </a:pPr>
-            <a:r>
-              <a:t>vs re-trained SwinIR: +1.44 dB · +0.023 SSIM · +9.2 MUSIQ · +0.048 MANIQA</a:t>
+        <p:style>
+          <a:lnRef idx="1">
+            <a:schemeClr val="accent1"/>
+          </a:lnRef>
+          <a:fillRef idx="3">
+            <a:schemeClr val="accent1"/>
+          </a:fillRef>
+          <a:effectRef idx="2">
+            <a:schemeClr val="accent1"/>
+          </a:effectRef>
+          <a:fontRef idx="minor">
+            <a:schemeClr val="lt1"/>
+          </a:fontRef>
+        </p:style>
+        <p:txBody>
+          <a:bodyPr rtlCol="0" anchor="ctr" wrap="square" lIns="411480" tIns="109728"/>
+          <a:lstStyle/>
+          <a:p>
+            <a:pPr algn="ctr">
+              <a:defRPr sz="2600" b="1">
+                <a:solidFill>
+                  <a:srgbClr val="FFFFFF"/>
+                </a:solidFill>
+              </a:defRPr>
+            </a:pPr>
+            <a:r>
+              <a:t>Method — one recipe, four levers</a:t>
             </a:r>
           </a:p>
         </p:txBody>
@@ -3883,7 +5943,7 @@
         </p:nvSpPr>
         <p:spPr>
           <a:xfrm>
-            <a:off x="548640" y="1463040"/>
+            <a:off x="548640" y="1325880"/>
             <a:ext cx="11064240" cy="4937760"/>
           </a:xfrm>
           <a:prstGeom prst="rect">
@@ -3896,896 +5956,183 @@
             <a:spAutoFit/>
           </a:bodyPr>
           <a:lstStyle/>
-          <a:p/>
-        </p:txBody>
-      </p:sp>
-      <p:graphicFrame>
-        <p:nvGraphicFramePr>
-          <p:cNvPr id="4" name="Table 3"/>
-          <p:cNvGraphicFramePr>
-            <a:graphicFrameLocks noGrp="1"/>
-          </p:cNvGraphicFramePr>
+          <a:p>
+            <a:pPr>
+              <a:spcAft>
+                <a:spcPts val="900"/>
+              </a:spcAft>
+              <a:defRPr sz="1700">
+                <a:solidFill>
+                  <a:srgbClr val="222222"/>
+                </a:solidFill>
+              </a:defRPr>
+            </a:pPr>
+            <a:r>
+              <a:t>Stride-1 U-Net regressor — no lossy downsample in the trunk; residual-bicubic with a</a:t>
+            </a:r>
+          </a:p>
+          <a:p>
+            <a:pPr lvl="1">
+              <a:spcAft>
+                <a:spcPts val="400"/>
+              </a:spcAft>
+              <a:defRPr sz="1500">
+                <a:solidFill>
+                  <a:srgbClr val="444444"/>
+                </a:solidFill>
+              </a:defRPr>
+            </a:pPr>
+            <a:r>
+              <a:t>zero-init head (step-0 = exact bicubic).  Biggest single lever (+0.38 dB).</a:t>
+            </a:r>
+          </a:p>
+          <a:p>
+            <a:pPr>
+              <a:spcAft>
+                <a:spcPts val="900"/>
+              </a:spcAft>
+              <a:defRPr sz="1700">
+                <a:solidFill>
+                  <a:srgbClr val="222222"/>
+                </a:solidFill>
+              </a:defRPr>
+            </a:pPr>
+            <a:r>
+              <a:t>Orthogonal wavelet high-frequency loss — multi-scale L1 on Haar HL/LH/HH (λ≈8);</a:t>
+            </a:r>
+          </a:p>
+          <a:p>
+            <a:pPr lvl="1">
+              <a:spcAft>
+                <a:spcPts val="400"/>
+              </a:spcAft>
+              <a:defRPr sz="1500">
+                <a:solidFill>
+                  <a:srgbClr val="444444"/>
+                </a:solidFill>
+              </a:defRPr>
+            </a:pPr>
+            <a:r>
+              <a:t>counters L1's mean-shrinkage of the high band at zero inference cost.</a:t>
+            </a:r>
+          </a:p>
+          <a:p>
+            <a:pPr>
+              <a:spcAft>
+                <a:spcPts val="900"/>
+              </a:spcAft>
+              <a:defRPr sz="1700">
+                <a:solidFill>
+                  <a:srgbClr val="222222"/>
+                </a:solidFill>
+              </a:defRPr>
+            </a:pPr>
+            <a:r>
+              <a:t>Shift-ensemble of that loss (avg over dyadic offsets) ≈ shift-invariance — best perceptual arm.</a:t>
+            </a:r>
+          </a:p>
+          <a:p>
+            <a:pPr>
+              <a:spcAft>
+                <a:spcPts val="900"/>
+              </a:spcAft>
+              <a:defRPr sz="1700">
+                <a:solidFill>
+                  <a:srgbClr val="222222"/>
+                </a:solidFill>
+              </a:defRPr>
+            </a:pPr>
+            <a:r>
+              <a:t>Muon optimizer (Newton–Schulz orthogonalised ≥2D updates) lr 5e-3 — beats AdamW at every lr.</a:t>
+            </a:r>
+          </a:p>
+          <a:p>
+            <a:pPr>
+              <a:spcAft>
+                <a:spcPts val="900"/>
+              </a:spcAft>
+              <a:defRPr sz="1700">
+                <a:solidFill>
+                  <a:srgbClr val="222222"/>
+                </a:solidFill>
+              </a:defRPr>
+            </a:pPr>
+            <a:r>
+              <a:t>BSRGAN synthetic pretrain → RealSR finetune; D4 8-fold test-time augmentation.</a:t>
+            </a:r>
+          </a:p>
+        </p:txBody>
+      </p:sp>
+      <p:sp>
+        <p:nvSpPr>
+          <p:cNvPr id="4" name="TextBox 3"/>
+          <p:cNvSpPr txBox="1"/>
           <p:nvPr/>
-        </p:nvGraphicFramePr>
-        <p:xfrm>
-          <a:off x="457200" y="1645920"/>
-          <a:ext cx="11247120" cy="3657600"/>
-        </p:xfrm>
-        <a:graphic>
-          <a:graphicData uri="http://schemas.openxmlformats.org/drawingml/2006/table">
-            <a:tbl>
-              <a:tblPr firstRow="1" bandRow="1">
-                <a:tableStyleId>{5C22544A-7EE6-4342-B048-85BDC9FD1C3A}</a:tableStyleId>
-              </a:tblPr>
-              <a:tblGrid>
-                <a:gridCol w="1606731"/>
-                <a:gridCol w="1606731"/>
-                <a:gridCol w="1606731"/>
-                <a:gridCol w="1606731"/>
-                <a:gridCol w="1606731"/>
-                <a:gridCol w="1606731"/>
-                <a:gridCol w="1606734"/>
-              </a:tblGrid>
-              <a:tr h="457200">
-                <a:tc>
-                  <a:txBody>
-                    <a:bodyPr/>
-                    <a:lstStyle/>
-                    <a:p>
-                      <a:pPr>
-                        <a:defRPr sz="1400" b="1"/>
-                      </a:pPr>
-                      <a:r>
-                        <a:t>Method</a:t>
-                      </a:r>
-                    </a:p>
-                  </a:txBody>
-                  <a:tcPr/>
-                </a:tc>
-                <a:tc>
-                  <a:txBody>
-                    <a:bodyPr/>
-                    <a:lstStyle/>
-                    <a:p>
-                      <a:pPr>
-                        <a:defRPr sz="1400" b="1"/>
-                      </a:pPr>
-                      <a:r>
-                        <a:t>Type</a:t>
-                      </a:r>
-                    </a:p>
-                  </a:txBody>
-                  <a:tcPr/>
-                </a:tc>
-                <a:tc>
-                  <a:txBody>
-                    <a:bodyPr/>
-                    <a:lstStyle/>
-                    <a:p>
-                      <a:pPr>
-                        <a:defRPr sz="1400" b="1"/>
-                      </a:pPr>
-                      <a:r>
-                        <a:t>Params</a:t>
-                      </a:r>
-                    </a:p>
-                  </a:txBody>
-                  <a:tcPr/>
-                </a:tc>
-                <a:tc>
-                  <a:txBody>
-                    <a:bodyPr/>
-                    <a:lstStyle/>
-                    <a:p>
-                      <a:pPr>
-                        <a:defRPr sz="1400" b="1"/>
-                      </a:pPr>
-                      <a:r>
-                        <a:t>PSNR-Y</a:t>
-                      </a:r>
-                    </a:p>
-                  </a:txBody>
-                  <a:tcPr/>
-                </a:tc>
-                <a:tc>
-                  <a:txBody>
-                    <a:bodyPr/>
-                    <a:lstStyle/>
-                    <a:p>
-                      <a:pPr>
-                        <a:defRPr sz="1400" b="1"/>
-                      </a:pPr>
-                      <a:r>
-                        <a:t>SSIM</a:t>
-                      </a:r>
-                    </a:p>
-                  </a:txBody>
-                  <a:tcPr/>
-                </a:tc>
-                <a:tc>
-                  <a:txBody>
-                    <a:bodyPr/>
-                    <a:lstStyle/>
-                    <a:p>
-                      <a:pPr>
-                        <a:defRPr sz="1400" b="1"/>
-                      </a:pPr>
-                      <a:r>
-                        <a:t>MUSIQ</a:t>
-                      </a:r>
-                    </a:p>
-                  </a:txBody>
-                  <a:tcPr/>
-                </a:tc>
-                <a:tc>
-                  <a:txBody>
-                    <a:bodyPr/>
-                    <a:lstStyle/>
-                    <a:p>
-                      <a:pPr>
-                        <a:defRPr sz="1400" b="1"/>
-                      </a:pPr>
-                      <a:r>
-                        <a:t>MANIQA</a:t>
-                      </a:r>
-                    </a:p>
-                  </a:txBody>
-                  <a:tcPr/>
-                </a:tc>
-              </a:tr>
-              <a:tr h="457200">
-                <a:tc>
-                  <a:txBody>
-                    <a:bodyPr/>
-                    <a:lstStyle/>
-                    <a:p>
-                      <a:pPr>
-                        <a:defRPr sz="1300"/>
-                      </a:pPr>
-                      <a:r>
-                        <a:t>Bicubic</a:t>
-                      </a:r>
-                    </a:p>
-                  </a:txBody>
-                  <a:tcPr/>
-                </a:tc>
-                <a:tc>
-                  <a:txBody>
-                    <a:bodyPr/>
-                    <a:lstStyle/>
-                    <a:p>
-                      <a:pPr>
-                        <a:defRPr sz="1300"/>
-                      </a:pPr>
-                      <a:r>
-                        <a:t>floor</a:t>
-                      </a:r>
-                    </a:p>
-                  </a:txBody>
-                  <a:tcPr/>
-                </a:tc>
-                <a:tc>
-                  <a:txBody>
-                    <a:bodyPr/>
-                    <a:lstStyle/>
-                    <a:p>
-                      <a:pPr>
-                        <a:defRPr sz="1300"/>
-                      </a:pPr>
-                      <a:r>
-                        <a:t>—</a:t>
-                      </a:r>
-                    </a:p>
-                  </a:txBody>
-                  <a:tcPr/>
-                </a:tc>
-                <a:tc>
-                  <a:txBody>
-                    <a:bodyPr/>
-                    <a:lstStyle/>
-                    <a:p>
-                      <a:pPr>
-                        <a:defRPr sz="1300"/>
-                      </a:pPr>
-                      <a:r>
-                        <a:t>31.73</a:t>
-                      </a:r>
-                    </a:p>
-                  </a:txBody>
-                  <a:tcPr/>
-                </a:tc>
-                <a:tc>
-                  <a:txBody>
-                    <a:bodyPr/>
-                    <a:lstStyle/>
-                    <a:p>
-                      <a:pPr>
-                        <a:defRPr sz="1300"/>
-                      </a:pPr>
-                      <a:r>
-                        <a:t>0.8876</a:t>
-                      </a:r>
-                    </a:p>
-                  </a:txBody>
-                  <a:tcPr/>
-                </a:tc>
-                <a:tc>
-                  <a:txBody>
-                    <a:bodyPr/>
-                    <a:lstStyle/>
-                    <a:p>
-                      <a:pPr>
-                        <a:defRPr sz="1300"/>
-                      </a:pPr>
-                      <a:r>
-                        <a:t>39.40</a:t>
-                      </a:r>
-                    </a:p>
-                  </a:txBody>
-                  <a:tcPr/>
-                </a:tc>
-                <a:tc>
-                  <a:txBody>
-                    <a:bodyPr/>
-                    <a:lstStyle/>
-                    <a:p>
-                      <a:pPr>
-                        <a:defRPr sz="1300"/>
-                      </a:pPr>
-                      <a:r>
-                        <a:t>0.278</a:t>
-                      </a:r>
-                    </a:p>
-                  </a:txBody>
-                  <a:tcPr/>
-                </a:tc>
-              </a:tr>
-              <a:tr h="457200">
-                <a:tc>
-                  <a:txBody>
-                    <a:bodyPr/>
-                    <a:lstStyle/>
-                    <a:p>
-                      <a:pPr>
-                        <a:defRPr sz="1300"/>
-                      </a:pPr>
-                      <a:r>
-                        <a:t>SwinIR-light (re-trained)</a:t>
-                      </a:r>
-                    </a:p>
-                  </a:txBody>
-                  <a:tcPr/>
-                </a:tc>
-                <a:tc>
-                  <a:txBody>
-                    <a:bodyPr/>
-                    <a:lstStyle/>
-                    <a:p>
-                      <a:pPr>
-                        <a:defRPr sz="1300"/>
-                      </a:pPr>
-                      <a:r>
-                        <a:t>Transformer</a:t>
-                      </a:r>
-                    </a:p>
-                  </a:txBody>
-                  <a:tcPr/>
-                </a:tc>
-                <a:tc>
-                  <a:txBody>
-                    <a:bodyPr/>
-                    <a:lstStyle/>
-                    <a:p>
-                      <a:pPr>
-                        <a:defRPr sz="1300"/>
-                      </a:pPr>
-                      <a:r>
-                        <a:t>0.61M</a:t>
-                      </a:r>
-                    </a:p>
-                  </a:txBody>
-                  <a:tcPr/>
-                </a:tc>
-                <a:tc>
-                  <a:txBody>
-                    <a:bodyPr/>
-                    <a:lstStyle/>
-                    <a:p>
-                      <a:pPr>
-                        <a:defRPr sz="1300"/>
-                      </a:pPr>
-                      <a:r>
-                        <a:t>32.88</a:t>
-                      </a:r>
-                    </a:p>
-                  </a:txBody>
-                  <a:tcPr/>
-                </a:tc>
-                <a:tc>
-                  <a:txBody>
-                    <a:bodyPr/>
-                    <a:lstStyle/>
-                    <a:p>
-                      <a:pPr>
-                        <a:defRPr sz="1300"/>
-                      </a:pPr>
-                      <a:r>
-                        <a:t>0.9026</a:t>
-                      </a:r>
-                    </a:p>
-                  </a:txBody>
-                  <a:tcPr/>
-                </a:tc>
-                <a:tc>
-                  <a:txBody>
-                    <a:bodyPr/>
-                    <a:lstStyle/>
-                    <a:p>
-                      <a:pPr>
-                        <a:defRPr sz="1300"/>
-                      </a:pPr>
-                      <a:r>
-                        <a:t>45.43</a:t>
-                      </a:r>
-                    </a:p>
-                  </a:txBody>
-                  <a:tcPr/>
-                </a:tc>
-                <a:tc>
-                  <a:txBody>
-                    <a:bodyPr/>
-                    <a:lstStyle/>
-                    <a:p>
-                      <a:pPr>
-                        <a:defRPr sz="1300"/>
-                      </a:pPr>
-                      <a:r>
-                        <a:t>0.302</a:t>
-                      </a:r>
-                    </a:p>
-                  </a:txBody>
-                  <a:tcPr/>
-                </a:tc>
-              </a:tr>
-              <a:tr h="457200">
-                <a:tc>
-                  <a:txBody>
-                    <a:bodyPr/>
-                    <a:lstStyle/>
-                    <a:p>
-                      <a:pPr>
-                        <a:defRPr sz="1300"/>
-                      </a:pPr>
-                      <a:r>
-                        <a:t>SwinIR-largeish (re-trained)</a:t>
-                      </a:r>
-                    </a:p>
-                  </a:txBody>
-                  <a:tcPr/>
-                </a:tc>
-                <a:tc>
-                  <a:txBody>
-                    <a:bodyPr/>
-                    <a:lstStyle/>
-                    <a:p>
-                      <a:pPr>
-                        <a:defRPr sz="1300"/>
-                      </a:pPr>
-                      <a:r>
-                        <a:t>Transformer</a:t>
-                      </a:r>
-                    </a:p>
-                  </a:txBody>
-                  <a:tcPr/>
-                </a:tc>
-                <a:tc>
-                  <a:txBody>
-                    <a:bodyPr/>
-                    <a:lstStyle/>
-                    <a:p>
-                      <a:pPr>
-                        <a:defRPr sz="1300"/>
-                      </a:pPr>
-                      <a:r>
-                        <a:t>3.96M</a:t>
-                      </a:r>
-                    </a:p>
-                  </a:txBody>
-                  <a:tcPr/>
-                </a:tc>
-                <a:tc>
-                  <a:txBody>
-                    <a:bodyPr/>
-                    <a:lstStyle/>
-                    <a:p>
-                      <a:pPr>
-                        <a:defRPr sz="1300"/>
-                      </a:pPr>
-                      <a:r>
-                        <a:t>32.97</a:t>
-                      </a:r>
-                    </a:p>
-                  </a:txBody>
-                  <a:tcPr/>
-                </a:tc>
-                <a:tc>
-                  <a:txBody>
-                    <a:bodyPr/>
-                    <a:lstStyle/>
-                    <a:p>
-                      <a:pPr>
-                        <a:defRPr sz="1300"/>
-                      </a:pPr>
-                      <a:r>
-                        <a:t>0.9058</a:t>
-                      </a:r>
-                    </a:p>
-                  </a:txBody>
-                  <a:tcPr/>
-                </a:tc>
-                <a:tc>
-                  <a:txBody>
-                    <a:bodyPr/>
-                    <a:lstStyle/>
-                    <a:p>
-                      <a:pPr>
-                        <a:defRPr sz="1300"/>
-                      </a:pPr>
-                      <a:r>
-                        <a:t>46.79</a:t>
-                      </a:r>
-                    </a:p>
-                  </a:txBody>
-                  <a:tcPr/>
-                </a:tc>
-                <a:tc>
-                  <a:txBody>
-                    <a:bodyPr/>
-                    <a:lstStyle/>
-                    <a:p>
-                      <a:pPr>
-                        <a:defRPr sz="1300"/>
-                      </a:pPr>
-                      <a:r>
-                        <a:t>0.305</a:t>
-                      </a:r>
-                    </a:p>
-                  </a:txBody>
-                  <a:tcPr/>
-                </a:tc>
-              </a:tr>
-              <a:tr h="457200">
-                <a:tc>
-                  <a:txBody>
-                    <a:bodyPr/>
-                    <a:lstStyle/>
-                    <a:p>
-                      <a:pPr>
-                        <a:defRPr sz="1300"/>
-                      </a:pPr>
-                      <a:r>
-                        <a:t>E11 Mod-SwinIR (Align-L1)</a:t>
-                      </a:r>
-                    </a:p>
-                  </a:txBody>
-                  <a:tcPr/>
-                </a:tc>
-                <a:tc>
-                  <a:txBody>
-                    <a:bodyPr/>
-                    <a:lstStyle/>
-                    <a:p>
-                      <a:pPr>
-                        <a:defRPr sz="1300"/>
-                      </a:pPr>
-                      <a:r>
-                        <a:t>Transformer</a:t>
-                      </a:r>
-                    </a:p>
-                  </a:txBody>
-                  <a:tcPr/>
-                </a:tc>
-                <a:tc>
-                  <a:txBody>
-                    <a:bodyPr/>
-                    <a:lstStyle/>
-                    <a:p>
-                      <a:pPr>
-                        <a:defRPr sz="1300"/>
-                      </a:pPr>
-                      <a:r>
-                        <a:t>4.05M</a:t>
-                      </a:r>
-                    </a:p>
-                  </a:txBody>
-                  <a:tcPr/>
-                </a:tc>
-                <a:tc>
-                  <a:txBody>
-                    <a:bodyPr/>
-                    <a:lstStyle/>
-                    <a:p>
-                      <a:pPr>
-                        <a:defRPr sz="1300"/>
-                      </a:pPr>
-                      <a:r>
-                        <a:t>33.47</a:t>
-                      </a:r>
-                    </a:p>
-                  </a:txBody>
-                  <a:tcPr/>
-                </a:tc>
-                <a:tc>
-                  <a:txBody>
-                    <a:bodyPr/>
-                    <a:lstStyle/>
-                    <a:p>
-                      <a:pPr>
-                        <a:defRPr sz="1300"/>
-                      </a:pPr>
-                      <a:r>
-                        <a:t>0.9143</a:t>
-                      </a:r>
-                    </a:p>
-                  </a:txBody>
-                  <a:tcPr/>
-                </a:tc>
-                <a:tc>
-                  <a:txBody>
-                    <a:bodyPr/>
-                    <a:lstStyle/>
-                    <a:p>
-                      <a:pPr>
-                        <a:defRPr sz="1300"/>
-                      </a:pPr>
-                      <a:r>
-                        <a:t>49.15</a:t>
-                      </a:r>
-                    </a:p>
-                  </a:txBody>
-                  <a:tcPr/>
-                </a:tc>
-                <a:tc>
-                  <a:txBody>
-                    <a:bodyPr/>
-                    <a:lstStyle/>
-                    <a:p>
-                      <a:pPr>
-                        <a:defRPr sz="1300"/>
-                      </a:pPr>
-                      <a:r>
-                        <a:t>0.309</a:t>
-                      </a:r>
-                    </a:p>
-                  </a:txBody>
-                  <a:tcPr/>
-                </a:tc>
-              </a:tr>
-              <a:tr h="457200">
-                <a:tc>
-                  <a:txBody>
-                    <a:bodyPr/>
-                    <a:lstStyle/>
-                    <a:p>
-                      <a:pPr>
-                        <a:defRPr sz="1300"/>
-                      </a:pPr>
-                      <a:r>
-                        <a:t>EDSR-baseline (repro.)</a:t>
-                      </a:r>
-                    </a:p>
-                  </a:txBody>
-                  <a:tcPr/>
-                </a:tc>
-                <a:tc>
-                  <a:txBody>
-                    <a:bodyPr/>
-                    <a:lstStyle/>
-                    <a:p>
-                      <a:pPr>
-                        <a:defRPr sz="1300"/>
-                      </a:pPr>
-                      <a:r>
-                        <a:t>CNN</a:t>
-                      </a:r>
-                    </a:p>
-                  </a:txBody>
-                  <a:tcPr/>
-                </a:tc>
-                <a:tc>
-                  <a:txBody>
-                    <a:bodyPr/>
-                    <a:lstStyle/>
-                    <a:p>
-                      <a:pPr>
-                        <a:defRPr sz="1300"/>
-                      </a:pPr>
-                      <a:r>
-                        <a:t>1.19M</a:t>
-                      </a:r>
-                    </a:p>
-                  </a:txBody>
-                  <a:tcPr/>
-                </a:tc>
-                <a:tc>
-                  <a:txBody>
-                    <a:bodyPr/>
-                    <a:lstStyle/>
-                    <a:p>
-                      <a:pPr>
-                        <a:defRPr sz="1300"/>
-                      </a:pPr>
-                      <a:r>
-                        <a:t>33.60</a:t>
-                      </a:r>
-                    </a:p>
-                  </a:txBody>
-                  <a:tcPr/>
-                </a:tc>
-                <a:tc>
-                  <a:txBody>
-                    <a:bodyPr/>
-                    <a:lstStyle/>
-                    <a:p>
-                      <a:pPr>
-                        <a:defRPr sz="1300"/>
-                      </a:pPr>
-                      <a:r>
-                        <a:t>0.9167</a:t>
-                      </a:r>
-                    </a:p>
-                  </a:txBody>
-                  <a:tcPr/>
-                </a:tc>
-                <a:tc>
-                  <a:txBody>
-                    <a:bodyPr/>
-                    <a:lstStyle/>
-                    <a:p>
-                      <a:pPr>
-                        <a:defRPr sz="1300"/>
-                      </a:pPr>
-                      <a:r>
-                        <a:t>53.14</a:t>
-                      </a:r>
-                    </a:p>
-                  </a:txBody>
-                  <a:tcPr/>
-                </a:tc>
-                <a:tc>
-                  <a:txBody>
-                    <a:bodyPr/>
-                    <a:lstStyle/>
-                    <a:p>
-                      <a:pPr>
-                        <a:defRPr sz="1300"/>
-                      </a:pPr>
-                      <a:r>
-                        <a:t>0.327</a:t>
-                      </a:r>
-                    </a:p>
-                  </a:txBody>
-                  <a:tcPr/>
-                </a:tc>
-              </a:tr>
-              <a:tr h="457200">
-                <a:tc>
-                  <a:txBody>
-                    <a:bodyPr/>
-                    <a:lstStyle/>
-                    <a:p>
-                      <a:pPr>
-                        <a:defRPr sz="1300"/>
-                      </a:pPr>
-                      <a:r>
-                        <a:t>latent rectified-flow (ours)</a:t>
-                      </a:r>
-                    </a:p>
-                  </a:txBody>
-                  <a:tcPr/>
-                </a:tc>
-                <a:tc>
-                  <a:txBody>
-                    <a:bodyPr/>
-                    <a:lstStyle/>
-                    <a:p>
-                      <a:pPr>
-                        <a:defRPr sz="1300"/>
-                      </a:pPr>
-                      <a:r>
-                        <a:t>Generative</a:t>
-                      </a:r>
-                    </a:p>
-                  </a:txBody>
-                  <a:tcPr/>
-                </a:tc>
-                <a:tc>
-                  <a:txBody>
-                    <a:bodyPr/>
-                    <a:lstStyle/>
-                    <a:p>
-                      <a:pPr>
-                        <a:defRPr sz="1300"/>
-                      </a:pPr>
-                      <a:r>
-                        <a:t>32.9M</a:t>
-                      </a:r>
-                    </a:p>
-                  </a:txBody>
-                  <a:tcPr/>
-                </a:tc>
-                <a:tc>
-                  <a:txBody>
-                    <a:bodyPr/>
-                    <a:lstStyle/>
-                    <a:p>
-                      <a:pPr>
-                        <a:defRPr sz="1300"/>
-                      </a:pPr>
-                      <a:r>
-                        <a:t>28.36</a:t>
-                      </a:r>
-                    </a:p>
-                  </a:txBody>
-                  <a:tcPr/>
-                </a:tc>
-                <a:tc>
-                  <a:txBody>
-                    <a:bodyPr/>
-                    <a:lstStyle/>
-                    <a:p>
-                      <a:pPr>
-                        <a:defRPr sz="1300"/>
-                      </a:pPr>
-                      <a:r>
-                        <a:t>0.790</a:t>
-                      </a:r>
-                    </a:p>
-                  </a:txBody>
-                  <a:tcPr/>
-                </a:tc>
-                <a:tc>
-                  <a:txBody>
-                    <a:bodyPr/>
-                    <a:lstStyle/>
-                    <a:p>
-                      <a:pPr>
-                        <a:defRPr sz="1300"/>
-                      </a:pPr>
-                      <a:r>
-                        <a:t>50.12</a:t>
-                      </a:r>
-                    </a:p>
-                  </a:txBody>
-                  <a:tcPr/>
-                </a:tc>
-                <a:tc>
-                  <a:txBody>
-                    <a:bodyPr/>
-                    <a:lstStyle/>
-                    <a:p>
-                      <a:pPr>
-                        <a:defRPr sz="1300"/>
-                      </a:pPr>
-                      <a:r>
-                        <a:t>0.224</a:t>
-                      </a:r>
-                    </a:p>
-                  </a:txBody>
-                  <a:tcPr/>
-                </a:tc>
-              </a:tr>
-              <a:tr h="457200">
-                <a:tc>
-                  <a:txBody>
-                    <a:bodyPr/>
-                    <a:lstStyle/>
-                    <a:p>
-                      <a:pPr>
-                        <a:defRPr sz="1300"/>
-                      </a:pPr>
-                      <a:r>
-                        <a:t>Ours (full recipe + TTA)</a:t>
-                      </a:r>
-                    </a:p>
-                  </a:txBody>
-                  <a:tcPr/>
-                </a:tc>
-                <a:tc>
-                  <a:txBody>
-                    <a:bodyPr/>
-                    <a:lstStyle/>
-                    <a:p>
-                      <a:pPr>
-                        <a:defRPr sz="1300"/>
-                      </a:pPr>
-                      <a:r>
-                        <a:t>U-Net stride-1</a:t>
-                      </a:r>
-                    </a:p>
-                  </a:txBody>
-                  <a:tcPr/>
-                </a:tc>
-                <a:tc>
-                  <a:txBody>
-                    <a:bodyPr/>
-                    <a:lstStyle/>
-                    <a:p>
-                      <a:pPr>
-                        <a:defRPr sz="1300"/>
-                      </a:pPr>
-                      <a:r>
-                        <a:t>18.7M</a:t>
-                      </a:r>
-                    </a:p>
-                  </a:txBody>
-                  <a:tcPr/>
-                </a:tc>
-                <a:tc>
-                  <a:txBody>
-                    <a:bodyPr/>
-                    <a:lstStyle/>
-                    <a:p>
-                      <a:pPr>
-                        <a:defRPr sz="1300"/>
-                      </a:pPr>
-                      <a:r>
-                        <a:t>34.41</a:t>
-                      </a:r>
-                    </a:p>
-                  </a:txBody>
-                  <a:tcPr/>
-                </a:tc>
-                <a:tc>
-                  <a:txBody>
-                    <a:bodyPr/>
-                    <a:lstStyle/>
-                    <a:p>
-                      <a:pPr>
-                        <a:defRPr sz="1300"/>
-                      </a:pPr>
-                      <a:r>
-                        <a:t>0.9285</a:t>
-                      </a:r>
-                    </a:p>
-                  </a:txBody>
-                  <a:tcPr/>
-                </a:tc>
-                <a:tc>
-                  <a:txBody>
-                    <a:bodyPr/>
-                    <a:lstStyle/>
-                    <a:p>
-                      <a:pPr>
-                        <a:defRPr sz="1300"/>
-                      </a:pPr>
-                      <a:r>
-                        <a:t>55.96</a:t>
-                      </a:r>
-                    </a:p>
-                  </a:txBody>
-                  <a:tcPr/>
-                </a:tc>
-                <a:tc>
-                  <a:txBody>
-                    <a:bodyPr/>
-                    <a:lstStyle/>
-                    <a:p>
-                      <a:pPr>
-                        <a:defRPr sz="1300"/>
-                      </a:pPr>
-                      <a:r>
-                        <a:t>0.3534</a:t>
-                      </a:r>
-                    </a:p>
-                  </a:txBody>
-                  <a:tcPr/>
-                </a:tc>
-              </a:tr>
-            </a:tbl>
-          </a:graphicData>
-        </a:graphic>
-      </p:graphicFrame>
+        </p:nvSpPr>
+        <p:spPr>
+          <a:xfrm>
+            <a:off x="457200" y="6419088"/>
+            <a:ext cx="8686800" cy="320040"/>
+          </a:xfrm>
+          <a:prstGeom prst="rect">
+            <a:avLst/>
+          </a:prstGeom>
+          <a:noFill/>
+        </p:spPr>
+        <p:txBody>
+          <a:bodyPr wrap="none">
+            <a:spAutoFit/>
+          </a:bodyPr>
+          <a:lstStyle/>
+          <a:p>
+            <a:pPr>
+              <a:defRPr sz="900">
+                <a:solidFill>
+                  <a:srgbClr val="888888"/>
+                </a:solidFill>
+              </a:defRPr>
+            </a:pPr>
+            <a:r>
+              <a:t>RealSR ×2 · Real-World SR · stride-1 + wavelet-HF + Muon + TTA</a:t>
+            </a:r>
+          </a:p>
+        </p:txBody>
+      </p:sp>
+      <p:sp>
+        <p:nvSpPr>
+          <p:cNvPr id="5" name="TextBox 4"/>
+          <p:cNvSpPr txBox="1"/>
+          <p:nvPr/>
+        </p:nvSpPr>
+        <p:spPr>
+          <a:xfrm>
+            <a:off x="11247120" y="6419088"/>
+            <a:ext cx="822960" cy="320040"/>
+          </a:xfrm>
+          <a:prstGeom prst="rect">
+            <a:avLst/>
+          </a:prstGeom>
+          <a:noFill/>
+        </p:spPr>
+        <p:txBody>
+          <a:bodyPr wrap="none">
+            <a:spAutoFit/>
+          </a:bodyPr>
+          <a:lstStyle/>
+          <a:p>
+            <a:pPr algn="r">
+              <a:defRPr sz="1000">
+                <a:solidFill>
+                  <a:srgbClr val="888888"/>
+                </a:solidFill>
+              </a:defRPr>
+            </a:pPr>
+            <a:r>
+              <a:t>3</a:t>
+            </a:r>
+          </a:p>
+        </p:txBody>
+      </p:sp>
     </p:spTree>
   </p:cSld>
   <p:clrMapOvr>
@@ -4806,14 +6153,90 @@
       <p:grpSpPr/>
       <p:sp>
         <p:nvSpPr>
-          <p:cNvPr id="2" name="TextBox 1"/>
+          <p:cNvPr id="2" name="Rectangle 1"/>
+          <p:cNvSpPr/>
+          <p:nvPr/>
+        </p:nvSpPr>
+        <p:spPr>
+          <a:xfrm>
+            <a:off x="0" y="0"/>
+            <a:ext cx="12191695" cy="1051560"/>
+          </a:xfrm>
+          <a:prstGeom prst="rect">
+            <a:avLst/>
+          </a:prstGeom>
+          <a:solidFill>
+            <a:srgbClr val="1F4E79"/>
+          </a:solidFill>
+          <a:ln>
+            <a:noFill/>
+          </a:ln>
+        </p:spPr>
+        <p:style>
+          <a:lnRef idx="1">
+            <a:schemeClr val="accent1"/>
+          </a:lnRef>
+          <a:fillRef idx="3">
+            <a:schemeClr val="accent1"/>
+          </a:fillRef>
+          <a:effectRef idx="2">
+            <a:schemeClr val="accent1"/>
+          </a:effectRef>
+          <a:fontRef idx="minor">
+            <a:schemeClr val="lt1"/>
+          </a:fontRef>
+        </p:style>
+        <p:txBody>
+          <a:bodyPr rtlCol="0" anchor="ctr" wrap="square" lIns="411480" tIns="109728"/>
+          <a:lstStyle/>
+          <a:p>
+            <a:pPr algn="ctr">
+              <a:defRPr sz="2600" b="1">
+                <a:solidFill>
+                  <a:srgbClr val="FFFFFF"/>
+                </a:solidFill>
+              </a:defRPr>
+            </a:pPr>
+            <a:r>
+              <a:t>What actually moves RealSR ×2</a:t>
+            </a:r>
+          </a:p>
+        </p:txBody>
+      </p:sp>
+      <p:pic>
+        <p:nvPicPr>
+          <p:cNvPr id="3" name="Picture 2" descr="fig_ablation.png"/>
+          <p:cNvPicPr>
+            <a:picLocks noChangeAspect="1"/>
+          </p:cNvPicPr>
+          <p:nvPr/>
+        </p:nvPicPr>
+        <p:blipFill>
+          <a:blip r:embed="rId2"/>
+          <a:stretch>
+            <a:fillRect/>
+          </a:stretch>
+        </p:blipFill>
+        <p:spPr>
+          <a:xfrm>
+            <a:off x="640080" y="1325880"/>
+            <a:ext cx="10881360" cy="4904275"/>
+          </a:xfrm>
+          <a:prstGeom prst="rect">
+            <a:avLst/>
+          </a:prstGeom>
+        </p:spPr>
+      </p:pic>
+      <p:sp>
+        <p:nvSpPr>
+          <p:cNvPr id="4" name="TextBox 3"/>
           <p:cNvSpPr txBox="1"/>
           <p:nvPr/>
         </p:nvSpPr>
         <p:spPr>
           <a:xfrm>
-            <a:off x="457200" y="320040"/>
-            <a:ext cx="11247120" cy="914400"/>
+            <a:off x="640080" y="5989320"/>
+            <a:ext cx="10881360" cy="365760"/>
           </a:xfrm>
           <a:prstGeom prst="rect">
             <a:avLst/>
@@ -4826,29 +6249,29 @@
           </a:bodyPr>
           <a:lstStyle/>
           <a:p>
-            <a:pPr>
-              <a:defRPr sz="3000" b="1">
-                <a:solidFill>
-                  <a:srgbClr val="1F4E79"/>
-                </a:solidFill>
-              </a:defRPr>
-            </a:pPr>
-            <a:r>
-              <a:t>Baselines: reproduced vs cited</a:t>
-            </a:r>
-          </a:p>
-        </p:txBody>
-      </p:sp>
-      <p:sp>
-        <p:nvSpPr>
-          <p:cNvPr id="3" name="TextBox 2"/>
+            <a:pPr algn="ctr">
+              <a:defRPr sz="1100">
+                <a:solidFill>
+                  <a:srgbClr val="606060"/>
+                </a:solidFill>
+              </a:defRPr>
+            </a:pPr>
+            <a:r>
+              <a:t>One change at a time, identical protocol. Mechanism levers (architecture + frequency loss) dominate; extra capacity saturates.</a:t>
+            </a:r>
+          </a:p>
+        </p:txBody>
+      </p:sp>
+      <p:sp>
+        <p:nvSpPr>
+          <p:cNvPr id="5" name="TextBox 4"/>
           <p:cNvSpPr txBox="1"/>
           <p:nvPr/>
         </p:nvSpPr>
         <p:spPr>
           <a:xfrm>
-            <a:off x="548640" y="1463040"/>
-            <a:ext cx="11064240" cy="4937760"/>
+            <a:off x="457200" y="6419088"/>
+            <a:ext cx="8686800" cy="320040"/>
           </a:xfrm>
           <a:prstGeom prst="rect">
             <a:avLst/>
@@ -4856,83 +6279,55 @@
           <a:noFill/>
         </p:spPr>
         <p:txBody>
-          <a:bodyPr wrap="square">
+          <a:bodyPr wrap="none">
             <a:spAutoFit/>
           </a:bodyPr>
           <a:lstStyle/>
           <a:p>
             <a:pPr>
-              <a:spcAft>
-                <a:spcPts val="800"/>
-              </a:spcAft>
-              <a:defRPr sz="1800">
-                <a:solidFill>
-                  <a:srgbClr val="222222"/>
-                </a:solidFill>
-              </a:defRPr>
-            </a:pPr>
-            <a:r>
-              <a:t>Reproduced in-repo on the SAME protocol (A-strict): SwinIR (light/largeish), EDSR-baseline;</a:t>
-            </a:r>
-          </a:p>
-          <a:p>
-            <a:pPr>
-              <a:spcAft>
-                <a:spcPts val="800"/>
-              </a:spcAft>
-              <a:defRPr sz="1800">
-                <a:solidFill>
-                  <a:srgbClr val="222222"/>
-                </a:solidFill>
-              </a:defRPr>
-            </a:pPr>
-            <a:r>
-              <a:t>   RCAN / SRResNet / RRDB in the reproduction pipeline (docs/baseline).</a:t>
-            </a:r>
-          </a:p>
-          <a:p>
-            <a:pPr>
-              <a:spcAft>
-                <a:spcPts val="800"/>
-              </a:spcAft>
-              <a:defRPr sz="1800">
-                <a:solidFill>
-                  <a:srgbClr val="222222"/>
-                </a:solidFill>
-              </a:defRPr>
-            </a:pPr>
-            <a:r>
-              <a:t>Cited with protocol tags (not compared): BSRGAN/Real-ESRGAN (D-blind);</a:t>
-            </a:r>
-          </a:p>
-          <a:p>
-            <a:pPr>
-              <a:spcAft>
-                <a:spcPts val="800"/>
-              </a:spcAft>
-              <a:defRPr sz="1800">
-                <a:solidFill>
-                  <a:srgbClr val="222222"/>
-                </a:solidFill>
-              </a:defRPr>
-            </a:pPr>
-            <a:r>
-              <a:t>   StableSR/DiffBIR/SeeSR/ResShift/SinSR/OSEDiff/AdcSR/TSD-SR/TinySR/PURE/RealSR-R1 (B/C protocols).</a:t>
-            </a:r>
-          </a:p>
-          <a:p>
-            <a:pPr>
-              <a:spcAft>
-                <a:spcPts val="800"/>
-              </a:spcAft>
-              <a:defRPr sz="1800">
-                <a:solidFill>
-                  <a:srgbClr val="222222"/>
-                </a:solidFill>
-              </a:defRPr>
-            </a:pPr>
-            <a:r>
-              <a:t>Their RealSR PSNR sits at 22.6–26.3 dB on a synthetically re-degraded input — a different task.</a:t>
+              <a:defRPr sz="900">
+                <a:solidFill>
+                  <a:srgbClr val="888888"/>
+                </a:solidFill>
+              </a:defRPr>
+            </a:pPr>
+            <a:r>
+              <a:t>RealSR ×2 · Real-World SR · stride-1 + wavelet-HF + Muon + TTA</a:t>
+            </a:r>
+          </a:p>
+        </p:txBody>
+      </p:sp>
+      <p:sp>
+        <p:nvSpPr>
+          <p:cNvPr id="6" name="TextBox 5"/>
+          <p:cNvSpPr txBox="1"/>
+          <p:nvPr/>
+        </p:nvSpPr>
+        <p:spPr>
+          <a:xfrm>
+            <a:off x="11247120" y="6419088"/>
+            <a:ext cx="822960" cy="320040"/>
+          </a:xfrm>
+          <a:prstGeom prst="rect">
+            <a:avLst/>
+          </a:prstGeom>
+          <a:noFill/>
+        </p:spPr>
+        <p:txBody>
+          <a:bodyPr wrap="none">
+            <a:spAutoFit/>
+          </a:bodyPr>
+          <a:lstStyle/>
+          <a:p>
+            <a:pPr algn="r">
+              <a:defRPr sz="1000">
+                <a:solidFill>
+                  <a:srgbClr val="888888"/>
+                </a:solidFill>
+              </a:defRPr>
+            </a:pPr>
+            <a:r>
+              <a:t>4</a:t>
             </a:r>
           </a:p>
         </p:txBody>
@@ -4957,14 +6352,102 @@
       <p:grpSpPr/>
       <p:sp>
         <p:nvSpPr>
-          <p:cNvPr id="2" name="TextBox 1"/>
+          <p:cNvPr id="2" name="Rectangle 1"/>
+          <p:cNvSpPr/>
+          <p:nvPr/>
+        </p:nvSpPr>
+        <p:spPr>
+          <a:xfrm>
+            <a:off x="0" y="0"/>
+            <a:ext cx="12191695" cy="1051560"/>
+          </a:xfrm>
+          <a:prstGeom prst="rect">
+            <a:avLst/>
+          </a:prstGeom>
+          <a:solidFill>
+            <a:srgbClr val="1F4E79"/>
+          </a:solidFill>
+          <a:ln>
+            <a:noFill/>
+          </a:ln>
+        </p:spPr>
+        <p:style>
+          <a:lnRef idx="1">
+            <a:schemeClr val="accent1"/>
+          </a:lnRef>
+          <a:fillRef idx="3">
+            <a:schemeClr val="accent1"/>
+          </a:fillRef>
+          <a:effectRef idx="2">
+            <a:schemeClr val="accent1"/>
+          </a:effectRef>
+          <a:fontRef idx="minor">
+            <a:schemeClr val="lt1"/>
+          </a:fontRef>
+        </p:style>
+        <p:txBody>
+          <a:bodyPr rtlCol="0" anchor="ctr" wrap="square" lIns="411480" tIns="109728"/>
+          <a:lstStyle/>
+          <a:p>
+            <a:pPr algn="ctr">
+              <a:defRPr sz="2600" b="1">
+                <a:solidFill>
+                  <a:srgbClr val="FFFFFF"/>
+                </a:solidFill>
+              </a:defRPr>
+            </a:pPr>
+            <a:r>
+              <a:t>The empirical ceiling (training-free, no model)</a:t>
+            </a:r>
+          </a:p>
+          <a:p>
+            <a:pPr>
+              <a:defRPr sz="1300">
+                <a:solidFill>
+                  <a:srgbClr val="C7D6E5"/>
+                </a:solidFill>
+              </a:defRPr>
+            </a:pPr>
+            <a:r>
+              <a:t>diffusion/oracle.py — the three physical walls of RealSR</a:t>
+            </a:r>
+          </a:p>
+        </p:txBody>
+      </p:sp>
+      <p:pic>
+        <p:nvPicPr>
+          <p:cNvPr id="3" name="Picture 2" descr="fig_ceiling.png"/>
+          <p:cNvPicPr>
+            <a:picLocks noChangeAspect="1"/>
+          </p:cNvPicPr>
+          <p:nvPr/>
+        </p:nvPicPr>
+        <p:blipFill>
+          <a:blip r:embed="rId2"/>
+          <a:stretch>
+            <a:fillRect/>
+          </a:stretch>
+        </p:blipFill>
+        <p:spPr>
+          <a:xfrm>
+            <a:off x="640080" y="1325880"/>
+            <a:ext cx="10881360" cy="3994720"/>
+          </a:xfrm>
+          <a:prstGeom prst="rect">
+            <a:avLst/>
+          </a:prstGeom>
+        </p:spPr>
+      </p:pic>
+      <p:sp>
+        <p:nvSpPr>
+          <p:cNvPr id="4" name="TextBox 3"/>
           <p:cNvSpPr txBox="1"/>
           <p:nvPr/>
         </p:nvSpPr>
         <p:spPr>
           <a:xfrm>
-            <a:off x="457200" y="320040"/>
-            <a:ext cx="11247120" cy="914400"/>
+            <a:off x="640080" y="5989320"/>
+            <a:ext cx="10881360" cy="365760"/>
           </a:xfrm>
           <a:prstGeom prst="rect">
             <a:avLst/>
@@ -4977,29 +6460,29 @@
           </a:bodyPr>
           <a:lstStyle/>
           <a:p>
-            <a:pPr>
-              <a:defRPr sz="3000" b="1">
-                <a:solidFill>
-                  <a:srgbClr val="1F4E79"/>
-                </a:solidFill>
-              </a:defRPr>
-            </a:pPr>
-            <a:r>
-              <a:t>Ablations (Δ PSNR-Y)</a:t>
-            </a:r>
-          </a:p>
-        </p:txBody>
-      </p:sp>
-      <p:sp>
-        <p:nvSpPr>
-          <p:cNvPr id="3" name="TextBox 2"/>
+            <a:pPr algn="ctr">
+              <a:defRPr sz="1100">
+                <a:solidFill>
+                  <a:srgbClr val="606060"/>
+                </a:solidFill>
+              </a:defRPr>
+            </a:pPr>
+            <a:r>
+              <a:t>Registration is the binding wall: at 0.3–0.4 px residual misalignment the ceiling is 34.4–35.7 dB — our 34.41 sits inside it. Corrects the “38–40 dB noise floor” folklore (noise is small here).</a:t>
+            </a:r>
+          </a:p>
+        </p:txBody>
+      </p:sp>
+      <p:sp>
+        <p:nvSpPr>
+          <p:cNvPr id="5" name="TextBox 4"/>
           <p:cNvSpPr txBox="1"/>
           <p:nvPr/>
         </p:nvSpPr>
         <p:spPr>
           <a:xfrm>
-            <a:off x="548640" y="1463040"/>
-            <a:ext cx="11064240" cy="4937760"/>
+            <a:off x="457200" y="6419088"/>
+            <a:ext cx="8686800" cy="320040"/>
           </a:xfrm>
           <a:prstGeom prst="rect">
             <a:avLst/>
@@ -5007,537 +6490,59 @@
           <a:noFill/>
         </p:spPr>
         <p:txBody>
-          <a:bodyPr wrap="square">
+          <a:bodyPr wrap="none">
             <a:spAutoFit/>
           </a:bodyPr>
           <a:lstStyle/>
-          <a:p/>
-        </p:txBody>
-      </p:sp>
-      <p:graphicFrame>
-        <p:nvGraphicFramePr>
-          <p:cNvPr id="4" name="Table 3"/>
-          <p:cNvGraphicFramePr>
-            <a:graphicFrameLocks noGrp="1"/>
-          </p:cNvGraphicFramePr>
+          <a:p>
+            <a:pPr>
+              <a:defRPr sz="900">
+                <a:solidFill>
+                  <a:srgbClr val="888888"/>
+                </a:solidFill>
+              </a:defRPr>
+            </a:pPr>
+            <a:r>
+              <a:t>RealSR ×2 · Real-World SR · stride-1 + wavelet-HF + Muon + TTA</a:t>
+            </a:r>
+          </a:p>
+        </p:txBody>
+      </p:sp>
+      <p:sp>
+        <p:nvSpPr>
+          <p:cNvPr id="6" name="TextBox 5"/>
+          <p:cNvSpPr txBox="1"/>
           <p:nvPr/>
-        </p:nvGraphicFramePr>
-        <p:xfrm>
-          <a:off x="457200" y="1645920"/>
-          <a:ext cx="11247120" cy="3657600"/>
-        </p:xfrm>
-        <a:graphic>
-          <a:graphicData uri="http://schemas.openxmlformats.org/drawingml/2006/table">
-            <a:tbl>
-              <a:tblPr firstRow="1" bandRow="1">
-                <a:tableStyleId>{5C22544A-7EE6-4342-B048-85BDC9FD1C3A}</a:tableStyleId>
-              </a:tblPr>
-              <a:tblGrid>
-                <a:gridCol w="2811780"/>
-                <a:gridCol w="2811780"/>
-                <a:gridCol w="2811780"/>
-                <a:gridCol w="2811780"/>
-              </a:tblGrid>
-              <a:tr h="457200">
-                <a:tc>
-                  <a:txBody>
-                    <a:bodyPr/>
-                    <a:lstStyle/>
-                    <a:p>
-                      <a:pPr>
-                        <a:defRPr sz="1400" b="1"/>
-                      </a:pPr>
-                      <a:r>
-                        <a:t>Change</a:t>
-                      </a:r>
-                    </a:p>
-                  </a:txBody>
-                  <a:tcPr/>
-                </a:tc>
-                <a:tc>
-                  <a:txBody>
-                    <a:bodyPr/>
-                    <a:lstStyle/>
-                    <a:p>
-                      <a:pPr>
-                        <a:defRPr sz="1400" b="1"/>
-                      </a:pPr>
-                      <a:r>
-                        <a:t>Δ PSNR-Y</a:t>
-                      </a:r>
-                    </a:p>
-                  </a:txBody>
-                  <a:tcPr/>
-                </a:tc>
-                <a:tc>
-                  <a:txBody>
-                    <a:bodyPr/>
-                    <a:lstStyle/>
-                    <a:p>
-                      <a:pPr>
-                        <a:defRPr sz="1400" b="1"/>
-                      </a:pPr>
-                      <a:r>
-                        <a:t>Perceptual</a:t>
-                      </a:r>
-                    </a:p>
-                  </a:txBody>
-                  <a:tcPr/>
-                </a:tc>
-                <a:tc>
-                  <a:txBody>
-                    <a:bodyPr/>
-                    <a:lstStyle/>
-                    <a:p>
-                      <a:pPr>
-                        <a:defRPr sz="1400" b="1"/>
-                      </a:pPr>
-                      <a:r>
-                        <a:t>Cost</a:t>
-                      </a:r>
-                    </a:p>
-                  </a:txBody>
-                  <a:tcPr/>
-                </a:tc>
-              </a:tr>
-              <a:tr h="457200">
-                <a:tc>
-                  <a:txBody>
-                    <a:bodyPr/>
-                    <a:lstStyle/>
-                    <a:p>
-                      <a:pPr>
-                        <a:defRPr sz="1300"/>
-                      </a:pPr>
-                      <a:r>
-                        <a:t>stride-2 → stride-1 stem</a:t>
-                      </a:r>
-                    </a:p>
-                  </a:txBody>
-                  <a:tcPr/>
-                </a:tc>
-                <a:tc>
-                  <a:txBody>
-                    <a:bodyPr/>
-                    <a:lstStyle/>
-                    <a:p>
-                      <a:pPr>
-                        <a:defRPr sz="1300"/>
-                      </a:pPr>
-                      <a:r>
-                        <a:t>+0.38</a:t>
-                      </a:r>
-                    </a:p>
-                  </a:txBody>
-                  <a:tcPr/>
-                </a:tc>
-                <a:tc>
-                  <a:txBody>
-                    <a:bodyPr/>
-                    <a:lstStyle/>
-                    <a:p>
-                      <a:pPr>
-                        <a:defRPr sz="1300"/>
-                      </a:pPr>
-                      <a:r>
-                        <a:t>↑</a:t>
-                      </a:r>
-                    </a:p>
-                  </a:txBody>
-                  <a:tcPr/>
-                </a:tc>
-                <a:tc>
-                  <a:txBody>
-                    <a:bodyPr/>
-                    <a:lstStyle/>
-                    <a:p>
-                      <a:pPr>
-                        <a:defRPr sz="1300"/>
-                      </a:pPr>
-                      <a:r>
-                        <a:t>fewer params</a:t>
-                      </a:r>
-                    </a:p>
-                  </a:txBody>
-                  <a:tcPr/>
-                </a:tc>
-              </a:tr>
-              <a:tr h="457200">
-                <a:tc>
-                  <a:txBody>
-                    <a:bodyPr/>
-                    <a:lstStyle/>
-                    <a:p>
-                      <a:pPr>
-                        <a:defRPr sz="1300"/>
-                      </a:pPr>
-                      <a:r>
-                        <a:t>+ wavelet-HF loss (λ8)</a:t>
-                      </a:r>
-                    </a:p>
-                  </a:txBody>
-                  <a:tcPr/>
-                </a:tc>
-                <a:tc>
-                  <a:txBody>
-                    <a:bodyPr/>
-                    <a:lstStyle/>
-                    <a:p>
-                      <a:pPr>
-                        <a:defRPr sz="1300"/>
-                      </a:pPr>
-                      <a:r>
-                        <a:t>+0.11</a:t>
-                      </a:r>
-                    </a:p>
-                  </a:txBody>
-                  <a:tcPr/>
-                </a:tc>
-                <a:tc>
-                  <a:txBody>
-                    <a:bodyPr/>
-                    <a:lstStyle/>
-                    <a:p>
-                      <a:pPr>
-                        <a:defRPr sz="1300"/>
-                      </a:pPr>
-                      <a:r>
-                        <a:t>MUSIQ/MANIQA ↑</a:t>
-                      </a:r>
-                    </a:p>
-                  </a:txBody>
-                  <a:tcPr/>
-                </a:tc>
-                <a:tc>
-                  <a:txBody>
-                    <a:bodyPr/>
-                    <a:lstStyle/>
-                    <a:p>
-                      <a:pPr>
-                        <a:defRPr sz="1300"/>
-                      </a:pPr>
-                      <a:r>
-                        <a:t>zero inference</a:t>
-                      </a:r>
-                    </a:p>
-                  </a:txBody>
-                  <a:tcPr/>
-                </a:tc>
-              </a:tr>
-              <a:tr h="457200">
-                <a:tc>
-                  <a:txBody>
-                    <a:bodyPr/>
-                    <a:lstStyle/>
-                    <a:p>
-                      <a:pPr>
-                        <a:defRPr sz="1300"/>
-                      </a:pPr>
-                      <a:r>
-                        <a:t>+ shift-ensemble</a:t>
-                      </a:r>
-                    </a:p>
-                  </a:txBody>
-                  <a:tcPr/>
-                </a:tc>
-                <a:tc>
-                  <a:txBody>
-                    <a:bodyPr/>
-                    <a:lstStyle/>
-                    <a:p>
-                      <a:pPr>
-                        <a:defRPr sz="1300"/>
-                      </a:pPr>
-                      <a:r>
-                        <a:t>+0.02</a:t>
-                      </a:r>
-                    </a:p>
-                  </a:txBody>
-                  <a:tcPr/>
-                </a:tc>
-                <a:tc>
-                  <a:txBody>
-                    <a:bodyPr/>
-                    <a:lstStyle/>
-                    <a:p>
-                      <a:pPr>
-                        <a:defRPr sz="1300"/>
-                      </a:pPr>
-                      <a:r>
-                        <a:t>MUSIQ 56.0 (best)</a:t>
-                      </a:r>
-                    </a:p>
-                  </a:txBody>
-                  <a:tcPr/>
-                </a:tc>
-                <a:tc>
-                  <a:txBody>
-                    <a:bodyPr/>
-                    <a:lstStyle/>
-                    <a:p>
-                      <a:pPr>
-                        <a:defRPr sz="1300"/>
-                      </a:pPr>
-                      <a:r>
-                        <a:t>zero inference</a:t>
-                      </a:r>
-                    </a:p>
-                  </a:txBody>
-                  <a:tcPr/>
-                </a:tc>
-              </a:tr>
-              <a:tr h="457200">
-                <a:tc>
-                  <a:txBody>
-                    <a:bodyPr/>
-                    <a:lstStyle/>
-                    <a:p>
-                      <a:pPr>
-                        <a:defRPr sz="1300"/>
-                      </a:pPr>
-                      <a:r>
-                        <a:t>+ Muon (5e-3)</a:t>
-                      </a:r>
-                    </a:p>
-                  </a:txBody>
-                  <a:tcPr/>
-                </a:tc>
-                <a:tc>
-                  <a:txBody>
-                    <a:bodyPr/>
-                    <a:lstStyle/>
-                    <a:p>
-                      <a:pPr>
-                        <a:defRPr sz="1300"/>
-                      </a:pPr>
-                      <a:r>
-                        <a:t>+0.15</a:t>
-                      </a:r>
-                    </a:p>
-                  </a:txBody>
-                  <a:tcPr/>
-                </a:tc>
-                <a:tc>
-                  <a:txBody>
-                    <a:bodyPr/>
-                    <a:lstStyle/>
-                    <a:p>
-                      <a:pPr>
-                        <a:defRPr sz="1300"/>
-                      </a:pPr>
-                      <a:r>
-                        <a:t>↑</a:t>
-                      </a:r>
-                    </a:p>
-                  </a:txBody>
-                  <a:tcPr/>
-                </a:tc>
-                <a:tc>
-                  <a:txBody>
-                    <a:bodyPr/>
-                    <a:lstStyle/>
-                    <a:p>
-                      <a:pPr>
-                        <a:defRPr sz="1300"/>
-                      </a:pPr>
-                      <a:r>
-                        <a:t>zero inference</a:t>
-                      </a:r>
-                    </a:p>
-                  </a:txBody>
-                  <a:tcPr/>
-                </a:tc>
-              </a:tr>
-              <a:tr h="457200">
-                <a:tc>
-                  <a:txBody>
-                    <a:bodyPr/>
-                    <a:lstStyle/>
-                    <a:p>
-                      <a:pPr>
-                        <a:defRPr sz="1300"/>
-                      </a:pPr>
-                      <a:r>
-                        <a:t>+ BSRGAN pretrain</a:t>
-                      </a:r>
-                    </a:p>
-                  </a:txBody>
-                  <a:tcPr/>
-                </a:tc>
-                <a:tc>
-                  <a:txBody>
-                    <a:bodyPr/>
-                    <a:lstStyle/>
-                    <a:p>
-                      <a:pPr>
-                        <a:defRPr sz="1300"/>
-                      </a:pPr>
-                      <a:r>
-                        <a:t>+0.09</a:t>
-                      </a:r>
-                    </a:p>
-                  </a:txBody>
-                  <a:tcPr/>
-                </a:tc>
-                <a:tc>
-                  <a:txBody>
-                    <a:bodyPr/>
-                    <a:lstStyle/>
-                    <a:p>
-                      <a:pPr>
-                        <a:defRPr sz="1300"/>
-                      </a:pPr>
-                      <a:r>
-                        <a:t>↑</a:t>
-                      </a:r>
-                    </a:p>
-                  </a:txBody>
-                  <a:tcPr/>
-                </a:tc>
-                <a:tc>
-                  <a:txBody>
-                    <a:bodyPr/>
-                    <a:lstStyle/>
-                    <a:p>
-                      <a:pPr>
-                        <a:defRPr sz="1300"/>
-                      </a:pPr>
-                      <a:r>
-                        <a:t>6× wall-clock</a:t>
-                      </a:r>
-                    </a:p>
-                  </a:txBody>
-                  <a:tcPr/>
-                </a:tc>
-              </a:tr>
-              <a:tr h="457200">
-                <a:tc>
-                  <a:txBody>
-                    <a:bodyPr/>
-                    <a:lstStyle/>
-                    <a:p>
-                      <a:pPr>
-                        <a:defRPr sz="1300"/>
-                      </a:pPr>
-                      <a:r>
-                        <a:t>+ TTA</a:t>
-                      </a:r>
-                    </a:p>
-                  </a:txBody>
-                  <a:tcPr/>
-                </a:tc>
-                <a:tc>
-                  <a:txBody>
-                    <a:bodyPr/>
-                    <a:lstStyle/>
-                    <a:p>
-                      <a:pPr>
-                        <a:defRPr sz="1300"/>
-                      </a:pPr>
-                      <a:r>
-                        <a:t>+0.10</a:t>
-                      </a:r>
-                    </a:p>
-                  </a:txBody>
-                  <a:tcPr/>
-                </a:tc>
-                <a:tc>
-                  <a:txBody>
-                    <a:bodyPr/>
-                    <a:lstStyle/>
-                    <a:p>
-                      <a:pPr>
-                        <a:defRPr sz="1300"/>
-                      </a:pPr>
-                      <a:r>
-                        <a:t>SSIM/MANIQA ↑</a:t>
-                      </a:r>
-                    </a:p>
-                  </a:txBody>
-                  <a:tcPr/>
-                </a:tc>
-                <a:tc>
-                  <a:txBody>
-                    <a:bodyPr/>
-                    <a:lstStyle/>
-                    <a:p>
-                      <a:pPr>
-                        <a:defRPr sz="1300"/>
-                      </a:pPr>
-                      <a:r>
-                        <a:t>8× inference</a:t>
-                      </a:r>
-                    </a:p>
-                  </a:txBody>
-                  <a:tcPr/>
-                </a:tc>
-              </a:tr>
-              <a:tr h="457200">
-                <a:tc>
-                  <a:txBody>
-                    <a:bodyPr/>
-                    <a:lstStyle/>
-                    <a:p>
-                      <a:pPr>
-                        <a:defRPr sz="1300"/>
-                      </a:pPr>
-                      <a:r>
-                        <a:t>capacity 5M → 72.5M</a:t>
-                      </a:r>
-                    </a:p>
-                  </a:txBody>
-                  <a:tcPr/>
-                </a:tc>
-                <a:tc>
-                  <a:txBody>
-                    <a:bodyPr/>
-                    <a:lstStyle/>
-                    <a:p>
-                      <a:pPr>
-                        <a:defRPr sz="1300"/>
-                      </a:pPr>
-                      <a:r>
-                        <a:t>saturates</a:t>
-                      </a:r>
-                    </a:p>
-                  </a:txBody>
-                  <a:tcPr/>
-                </a:tc>
-                <a:tc>
-                  <a:txBody>
-                    <a:bodyPr/>
-                    <a:lstStyle/>
-                    <a:p>
-                      <a:pPr>
-                        <a:defRPr sz="1300"/>
-                      </a:pPr>
-                      <a:r>
-                        <a:t>~</a:t>
-                      </a:r>
-                    </a:p>
-                  </a:txBody>
-                  <a:tcPr/>
-                </a:tc>
-                <a:tc>
-                  <a:txBody>
-                    <a:bodyPr/>
-                    <a:lstStyle/>
-                    <a:p>
-                      <a:pPr>
-                        <a:defRPr sz="1300"/>
-                      </a:pPr>
-                      <a:r>
-                        <a:t>linear</a:t>
-                      </a:r>
-                    </a:p>
-                  </a:txBody>
-                  <a:tcPr/>
-                </a:tc>
-              </a:tr>
-            </a:tbl>
-          </a:graphicData>
-        </a:graphic>
-      </p:graphicFrame>
+        </p:nvSpPr>
+        <p:spPr>
+          <a:xfrm>
+            <a:off x="11247120" y="6419088"/>
+            <a:ext cx="822960" cy="320040"/>
+          </a:xfrm>
+          <a:prstGeom prst="rect">
+            <a:avLst/>
+          </a:prstGeom>
+          <a:noFill/>
+        </p:spPr>
+        <p:txBody>
+          <a:bodyPr wrap="none">
+            <a:spAutoFit/>
+          </a:bodyPr>
+          <a:lstStyle/>
+          <a:p>
+            <a:pPr algn="r">
+              <a:defRPr sz="1000">
+                <a:solidFill>
+                  <a:srgbClr val="888888"/>
+                </a:solidFill>
+              </a:defRPr>
+            </a:pPr>
+            <a:r>
+              <a:t>5</a:t>
+            </a:r>
+          </a:p>
+        </p:txBody>
+      </p:sp>
     </p:spTree>
   </p:cSld>
   <p:clrMapOvr>
@@ -5558,14 +6563,90 @@
       <p:grpSpPr/>
       <p:sp>
         <p:nvSpPr>
-          <p:cNvPr id="2" name="TextBox 1"/>
+          <p:cNvPr id="2" name="Rectangle 1"/>
+          <p:cNvSpPr/>
+          <p:nvPr/>
+        </p:nvSpPr>
+        <p:spPr>
+          <a:xfrm>
+            <a:off x="0" y="0"/>
+            <a:ext cx="12191695" cy="1051560"/>
+          </a:xfrm>
+          <a:prstGeom prst="rect">
+            <a:avLst/>
+          </a:prstGeom>
+          <a:solidFill>
+            <a:srgbClr val="1F4E79"/>
+          </a:solidFill>
+          <a:ln>
+            <a:noFill/>
+          </a:ln>
+        </p:spPr>
+        <p:style>
+          <a:lnRef idx="1">
+            <a:schemeClr val="accent1"/>
+          </a:lnRef>
+          <a:fillRef idx="3">
+            <a:schemeClr val="accent1"/>
+          </a:fillRef>
+          <a:effectRef idx="2">
+            <a:schemeClr val="accent1"/>
+          </a:effectRef>
+          <a:fontRef idx="minor">
+            <a:schemeClr val="lt1"/>
+          </a:fontRef>
+        </p:style>
+        <p:txBody>
+          <a:bodyPr rtlCol="0" anchor="ctr" wrap="square" lIns="411480" tIns="109728"/>
+          <a:lstStyle/>
+          <a:p>
+            <a:pPr algn="ctr">
+              <a:defRPr sz="2600" b="1">
+                <a:solidFill>
+                  <a:srgbClr val="FFFFFF"/>
+                </a:solidFill>
+              </a:defRPr>
+            </a:pPr>
+            <a:r>
+              <a:t>Perception–distortion tradeoff, reproduced in-house</a:t>
+            </a:r>
+          </a:p>
+        </p:txBody>
+      </p:sp>
+      <p:pic>
+        <p:nvPicPr>
+          <p:cNvPr id="3" name="Picture 2" descr="fig_tradeoff.png"/>
+          <p:cNvPicPr>
+            <a:picLocks noChangeAspect="1"/>
+          </p:cNvPicPr>
+          <p:nvPr/>
+        </p:nvPicPr>
+        <p:blipFill>
+          <a:blip r:embed="rId2"/>
+          <a:stretch>
+            <a:fillRect/>
+          </a:stretch>
+        </p:blipFill>
+        <p:spPr>
+          <a:xfrm>
+            <a:off x="640080" y="1325880"/>
+            <a:ext cx="10881360" cy="6062253"/>
+          </a:xfrm>
+          <a:prstGeom prst="rect">
+            <a:avLst/>
+          </a:prstGeom>
+        </p:spPr>
+      </p:pic>
+      <p:sp>
+        <p:nvSpPr>
+          <p:cNvPr id="4" name="TextBox 3"/>
           <p:cNvSpPr txBox="1"/>
           <p:nvPr/>
         </p:nvSpPr>
         <p:spPr>
           <a:xfrm>
-            <a:off x="457200" y="320040"/>
-            <a:ext cx="11247120" cy="914400"/>
+            <a:off x="640080" y="5989320"/>
+            <a:ext cx="10881360" cy="365760"/>
           </a:xfrm>
           <a:prstGeom prst="rect">
             <a:avLst/>
@@ -5578,41 +6659,29 @@
           </a:bodyPr>
           <a:lstStyle/>
           <a:p>
-            <a:pPr>
-              <a:defRPr sz="3000" b="1">
-                <a:solidFill>
-                  <a:srgbClr val="1F4E79"/>
-                </a:solidFill>
-              </a:defRPr>
-            </a:pPr>
-            <a:r>
-              <a:t>The empirical ceiling (training-free, no model)</a:t>
-            </a:r>
-          </a:p>
-          <a:p>
-            <a:pPr>
-              <a:defRPr sz="1400">
+            <a:pPr algn="ctr">
+              <a:defRPr sz="1100">
                 <a:solidFill>
                   <a:srgbClr val="606060"/>
                 </a:solidFill>
               </a:defRPr>
             </a:pPr>
             <a:r>
-              <a:t>×2 is registration-limited; our 34.41 sits inside 34.4–35.7. Corrects the '38–40 dB noise floor' folklore.</a:t>
-            </a:r>
-          </a:p>
-        </p:txBody>
-      </p:sp>
-      <p:sp>
-        <p:nvSpPr>
-          <p:cNvPr id="3" name="TextBox 2"/>
+              <a:t>Same test set &amp; protocol: our regression is at the fidelity frontier; our own generative arm pays ~6 dB for no-reference IQA — the Blau–Michaeli law made concrete on RealSR.</a:t>
+            </a:r>
+          </a:p>
+        </p:txBody>
+      </p:sp>
+      <p:sp>
+        <p:nvSpPr>
+          <p:cNvPr id="5" name="TextBox 4"/>
           <p:cNvSpPr txBox="1"/>
           <p:nvPr/>
         </p:nvSpPr>
         <p:spPr>
           <a:xfrm>
-            <a:off x="548640" y="1463040"/>
-            <a:ext cx="11064240" cy="4937760"/>
+            <a:off x="457200" y="6419088"/>
+            <a:ext cx="8686800" cy="320040"/>
           </a:xfrm>
           <a:prstGeom prst="rect">
             <a:avLst/>
@@ -5620,413 +6689,59 @@
           <a:noFill/>
         </p:spPr>
         <p:txBody>
-          <a:bodyPr wrap="square">
+          <a:bodyPr wrap="none">
             <a:spAutoFit/>
           </a:bodyPr>
           <a:lstStyle/>
-          <a:p/>
-        </p:txBody>
-      </p:sp>
-      <p:graphicFrame>
-        <p:nvGraphicFramePr>
-          <p:cNvPr id="4" name="Table 3"/>
-          <p:cNvGraphicFramePr>
-            <a:graphicFrameLocks noGrp="1"/>
-          </p:cNvGraphicFramePr>
+          <a:p>
+            <a:pPr>
+              <a:defRPr sz="900">
+                <a:solidFill>
+                  <a:srgbClr val="888888"/>
+                </a:solidFill>
+              </a:defRPr>
+            </a:pPr>
+            <a:r>
+              <a:t>RealSR ×2 · Real-World SR · stride-1 + wavelet-HF + Muon + TTA</a:t>
+            </a:r>
+          </a:p>
+        </p:txBody>
+      </p:sp>
+      <p:sp>
+        <p:nvSpPr>
+          <p:cNvPr id="6" name="TextBox 5"/>
+          <p:cNvSpPr txBox="1"/>
           <p:nvPr/>
-        </p:nvGraphicFramePr>
-        <p:xfrm>
-          <a:off x="457200" y="1645920"/>
-          <a:ext cx="11247120" cy="2743200"/>
-        </p:xfrm>
-        <a:graphic>
-          <a:graphicData uri="http://schemas.openxmlformats.org/drawingml/2006/table">
-            <a:tbl>
-              <a:tblPr firstRow="1" bandRow="1">
-                <a:tableStyleId>{5C22544A-7EE6-4342-B048-85BDC9FD1C3A}</a:tableStyleId>
-              </a:tblPr>
-              <a:tblGrid>
-                <a:gridCol w="2811780"/>
-                <a:gridCol w="2811780"/>
-                <a:gridCol w="2811780"/>
-                <a:gridCol w="2811780"/>
-              </a:tblGrid>
-              <a:tr h="457200">
-                <a:tc>
-                  <a:txBody>
-                    <a:bodyPr/>
-                    <a:lstStyle/>
-                    <a:p>
-                      <a:pPr>
-                        <a:defRPr sz="1400" b="1"/>
-                      </a:pPr>
-                      <a:r>
-                        <a:t>wall</a:t>
-                      </a:r>
-                    </a:p>
-                  </a:txBody>
-                  <a:tcPr/>
-                </a:tc>
-                <a:tc>
-                  <a:txBody>
-                    <a:bodyPr/>
-                    <a:lstStyle/>
-                    <a:p>
-                      <a:pPr>
-                        <a:defRPr sz="1400" b="1"/>
-                      </a:pPr>
-                      <a:r>
-                        <a:t>×2</a:t>
-                      </a:r>
-                    </a:p>
-                  </a:txBody>
-                  <a:tcPr/>
-                </a:tc>
-                <a:tc>
-                  <a:txBody>
-                    <a:bodyPr/>
-                    <a:lstStyle/>
-                    <a:p>
-                      <a:pPr>
-                        <a:defRPr sz="1400" b="1"/>
-                      </a:pPr>
-                      <a:r>
-                        <a:t>×3</a:t>
-                      </a:r>
-                    </a:p>
-                  </a:txBody>
-                  <a:tcPr/>
-                </a:tc>
-                <a:tc>
-                  <a:txBody>
-                    <a:bodyPr/>
-                    <a:lstStyle/>
-                    <a:p>
-                      <a:pPr>
-                        <a:defRPr sz="1400" b="1"/>
-                      </a:pPr>
-                      <a:r>
-                        <a:t>×4</a:t>
-                      </a:r>
-                    </a:p>
-                  </a:txBody>
-                  <a:tcPr/>
-                </a:tc>
-              </a:tr>
-              <a:tr h="457200">
-                <a:tc>
-                  <a:txBody>
-                    <a:bodyPr/>
-                    <a:lstStyle/>
-                    <a:p>
-                      <a:pPr>
-                        <a:defRPr sz="1300"/>
-                      </a:pPr>
-                      <a:r>
-                        <a:t>Registration E_align (0.3px shift)</a:t>
-                      </a:r>
-                    </a:p>
-                  </a:txBody>
-                  <a:tcPr/>
-                </a:tc>
-                <a:tc>
-                  <a:txBody>
-                    <a:bodyPr/>
-                    <a:lstStyle/>
-                    <a:p>
-                      <a:pPr>
-                        <a:defRPr sz="1300"/>
-                      </a:pPr>
-                      <a:r>
-                        <a:t>37.7</a:t>
-                      </a:r>
-                    </a:p>
-                  </a:txBody>
-                  <a:tcPr/>
-                </a:tc>
-                <a:tc>
-                  <a:txBody>
-                    <a:bodyPr/>
-                    <a:lstStyle/>
-                    <a:p>
-                      <a:pPr>
-                        <a:defRPr sz="1300"/>
-                      </a:pPr>
-                      <a:r>
-                        <a:t>37.7</a:t>
-                      </a:r>
-                    </a:p>
-                  </a:txBody>
-                  <a:tcPr/>
-                </a:tc>
-                <a:tc>
-                  <a:txBody>
-                    <a:bodyPr/>
-                    <a:lstStyle/>
-                    <a:p>
-                      <a:pPr>
-                        <a:defRPr sz="1300"/>
-                      </a:pPr>
-                      <a:r>
-                        <a:t>37.7</a:t>
-                      </a:r>
-                    </a:p>
-                  </a:txBody>
-                  <a:tcPr/>
-                </a:tc>
-              </a:tr>
-              <a:tr h="457200">
-                <a:tc>
-                  <a:txBody>
-                    <a:bodyPr/>
-                    <a:lstStyle/>
-                    <a:p>
-                      <a:pPr>
-                        <a:defRPr sz="1300"/>
-                      </a:pPr>
-                      <a:r>
-                        <a:t>Band-limit E_null (LP to LR Nyquist)</a:t>
-                      </a:r>
-                    </a:p>
-                  </a:txBody>
-                  <a:tcPr/>
-                </a:tc>
-                <a:tc>
-                  <a:txBody>
-                    <a:bodyPr/>
-                    <a:lstStyle/>
-                    <a:p>
-                      <a:pPr>
-                        <a:defRPr sz="1300"/>
-                      </a:pPr>
-                      <a:r>
-                        <a:t>40.65</a:t>
-                      </a:r>
-                    </a:p>
-                  </a:txBody>
-                  <a:tcPr/>
-                </a:tc>
-                <a:tc>
-                  <a:txBody>
-                    <a:bodyPr/>
-                    <a:lstStyle/>
-                    <a:p>
-                      <a:pPr>
-                        <a:defRPr sz="1300"/>
-                      </a:pPr>
-                      <a:r>
-                        <a:t>34.55</a:t>
-                      </a:r>
-                    </a:p>
-                  </a:txBody>
-                  <a:tcPr/>
-                </a:tc>
-                <a:tc>
-                  <a:txBody>
-                    <a:bodyPr/>
-                    <a:lstStyle/>
-                    <a:p>
-                      <a:pPr>
-                        <a:defRPr sz="1300"/>
-                      </a:pPr>
-                      <a:r>
-                        <a:t>31.27</a:t>
-                      </a:r>
-                    </a:p>
-                  </a:txBody>
-                  <a:tcPr/>
-                </a:tc>
-              </a:tr>
-              <a:tr h="457200">
-                <a:tc>
-                  <a:txBody>
-                    <a:bodyPr/>
-                    <a:lstStyle/>
-                    <a:p>
-                      <a:pPr>
-                        <a:defRPr sz="1300"/>
-                      </a:pPr>
-                      <a:r>
-                        <a:t>Sensor noise E_noise (MAD σ≈0.9/255)</a:t>
-                      </a:r>
-                    </a:p>
-                  </a:txBody>
-                  <a:tcPr/>
-                </a:tc>
-                <a:tc>
-                  <a:txBody>
-                    <a:bodyPr/>
-                    <a:lstStyle/>
-                    <a:p>
-                      <a:pPr>
-                        <a:defRPr sz="1300"/>
-                      </a:pPr>
-                      <a:r>
-                        <a:t>49.05</a:t>
-                      </a:r>
-                    </a:p>
-                  </a:txBody>
-                  <a:tcPr/>
-                </a:tc>
-                <a:tc>
-                  <a:txBody>
-                    <a:bodyPr/>
-                    <a:lstStyle/>
-                    <a:p>
-                      <a:pPr>
-                        <a:defRPr sz="1300"/>
-                      </a:pPr>
-                      <a:r>
-                        <a:t>49.05</a:t>
-                      </a:r>
-                    </a:p>
-                  </a:txBody>
-                  <a:tcPr/>
-                </a:tc>
-                <a:tc>
-                  <a:txBody>
-                    <a:bodyPr/>
-                    <a:lstStyle/>
-                    <a:p>
-                      <a:pPr>
-                        <a:defRPr sz="1300"/>
-                      </a:pPr>
-                      <a:r>
-                        <a:t>49.05</a:t>
-                      </a:r>
-                    </a:p>
-                  </a:txBody>
-                  <a:tcPr/>
-                </a:tc>
-              </a:tr>
-              <a:tr h="457200">
-                <a:tc>
-                  <a:txBody>
-                    <a:bodyPr/>
-                    <a:lstStyle/>
-                    <a:p>
-                      <a:pPr>
-                        <a:defRPr sz="1300"/>
-                      </a:pPr>
-                      <a:r>
-                        <a:t>composite (bandlimit+noise)</a:t>
-                      </a:r>
-                    </a:p>
-                  </a:txBody>
-                  <a:tcPr/>
-                </a:tc>
-                <a:tc>
-                  <a:txBody>
-                    <a:bodyPr/>
-                    <a:lstStyle/>
-                    <a:p>
-                      <a:pPr>
-                        <a:defRPr sz="1300"/>
-                      </a:pPr>
-                      <a:r>
-                        <a:t>40.1</a:t>
-                      </a:r>
-                    </a:p>
-                  </a:txBody>
-                  <a:tcPr/>
-                </a:tc>
-                <a:tc>
-                  <a:txBody>
-                    <a:bodyPr/>
-                    <a:lstStyle/>
-                    <a:p>
-                      <a:pPr>
-                        <a:defRPr sz="1300"/>
-                      </a:pPr>
-                      <a:r>
-                        <a:t>34.4</a:t>
-                      </a:r>
-                    </a:p>
-                  </a:txBody>
-                  <a:tcPr/>
-                </a:tc>
-                <a:tc>
-                  <a:txBody>
-                    <a:bodyPr/>
-                    <a:lstStyle/>
-                    <a:p>
-                      <a:pPr>
-                        <a:defRPr sz="1300"/>
-                      </a:pPr>
-                      <a:r>
-                        <a:t>31.2</a:t>
-                      </a:r>
-                    </a:p>
-                  </a:txBody>
-                  <a:tcPr/>
-                </a:tc>
-              </a:tr>
-              <a:tr h="457200">
-                <a:tc>
-                  <a:txBody>
-                    <a:bodyPr/>
-                    <a:lstStyle/>
-                    <a:p>
-                      <a:pPr>
-                        <a:defRPr sz="1300"/>
-                      </a:pPr>
-                      <a:r>
-                        <a:t>+ 0.3px residual registration</a:t>
-                      </a:r>
-                    </a:p>
-                  </a:txBody>
-                  <a:tcPr/>
-                </a:tc>
-                <a:tc>
-                  <a:txBody>
-                    <a:bodyPr/>
-                    <a:lstStyle/>
-                    <a:p>
-                      <a:pPr>
-                        <a:defRPr sz="1300"/>
-                      </a:pPr>
-                      <a:r>
-                        <a:t>35.7</a:t>
-                      </a:r>
-                    </a:p>
-                  </a:txBody>
-                  <a:tcPr/>
-                </a:tc>
-                <a:tc>
-                  <a:txBody>
-                    <a:bodyPr/>
-                    <a:lstStyle/>
-                    <a:p>
-                      <a:pPr>
-                        <a:defRPr sz="1300"/>
-                      </a:pPr>
-                      <a:r>
-                        <a:t>~32</a:t>
-                      </a:r>
-                    </a:p>
-                  </a:txBody>
-                  <a:tcPr/>
-                </a:tc>
-                <a:tc>
-                  <a:txBody>
-                    <a:bodyPr/>
-                    <a:lstStyle/>
-                    <a:p>
-                      <a:pPr>
-                        <a:defRPr sz="1300"/>
-                      </a:pPr>
-                      <a:r>
-                        <a:t>~29.5</a:t>
-                      </a:r>
-                    </a:p>
-                  </a:txBody>
-                  <a:tcPr/>
-                </a:tc>
-              </a:tr>
-            </a:tbl>
-          </a:graphicData>
-        </a:graphic>
-      </p:graphicFrame>
+        </p:nvSpPr>
+        <p:spPr>
+          <a:xfrm>
+            <a:off x="11247120" y="6419088"/>
+            <a:ext cx="822960" cy="320040"/>
+          </a:xfrm>
+          <a:prstGeom prst="rect">
+            <a:avLst/>
+          </a:prstGeom>
+          <a:noFill/>
+        </p:spPr>
+        <p:txBody>
+          <a:bodyPr wrap="none">
+            <a:spAutoFit/>
+          </a:bodyPr>
+          <a:lstStyle/>
+          <a:p>
+            <a:pPr algn="r">
+              <a:defRPr sz="1000">
+                <a:solidFill>
+                  <a:srgbClr val="888888"/>
+                </a:solidFill>
+              </a:defRPr>
+            </a:pPr>
+            <a:r>
+              <a:t>6</a:t>
+            </a:r>
+          </a:p>
+        </p:txBody>
+      </p:sp>
     </p:spTree>
   </p:cSld>
   <p:clrMapOvr>
@@ -6047,35 +6762,52 @@
       <p:grpSpPr/>
       <p:sp>
         <p:nvSpPr>
-          <p:cNvPr id="2" name="TextBox 1"/>
-          <p:cNvSpPr txBox="1"/>
+          <p:cNvPr id="2" name="Rectangle 1"/>
+          <p:cNvSpPr/>
           <p:nvPr/>
         </p:nvSpPr>
         <p:spPr>
           <a:xfrm>
-            <a:off x="457200" y="320040"/>
-            <a:ext cx="11247120" cy="914400"/>
+            <a:off x="0" y="0"/>
+            <a:ext cx="12191695" cy="1051560"/>
           </a:xfrm>
           <a:prstGeom prst="rect">
             <a:avLst/>
           </a:prstGeom>
-          <a:noFill/>
+          <a:solidFill>
+            <a:srgbClr val="1F4E79"/>
+          </a:solidFill>
+          <a:ln>
+            <a:noFill/>
+          </a:ln>
         </p:spPr>
-        <p:txBody>
-          <a:bodyPr wrap="none">
-            <a:spAutoFit/>
-          </a:bodyPr>
-          <a:lstStyle/>
-          <a:p>
-            <a:pPr>
-              <a:defRPr sz="3000" b="1">
-                <a:solidFill>
-                  <a:srgbClr val="1F4E79"/>
-                </a:solidFill>
-              </a:defRPr>
-            </a:pPr>
-            <a:r>
-              <a:t>Perception–distortion tradeoff, reproduced in-house</a:t>
+        <p:style>
+          <a:lnRef idx="1">
+            <a:schemeClr val="accent1"/>
+          </a:lnRef>
+          <a:fillRef idx="3">
+            <a:schemeClr val="accent1"/>
+          </a:fillRef>
+          <a:effectRef idx="2">
+            <a:schemeClr val="accent1"/>
+          </a:effectRef>
+          <a:fontRef idx="minor">
+            <a:schemeClr val="lt1"/>
+          </a:fontRef>
+        </p:style>
+        <p:txBody>
+          <a:bodyPr rtlCol="0" anchor="ctr" wrap="square" lIns="411480" tIns="109728"/>
+          <a:lstStyle/>
+          <a:p>
+            <a:pPr algn="ctr">
+              <a:defRPr sz="2600" b="1">
+                <a:solidFill>
+                  <a:srgbClr val="FFFFFF"/>
+                </a:solidFill>
+              </a:defRPr>
+            </a:pPr>
+            <a:r>
+              <a:t>Baselines: reproduced vs cited</a:t>
             </a:r>
           </a:p>
         </p:txBody>
@@ -6088,7 +6820,7 @@
         </p:nvSpPr>
         <p:spPr>
           <a:xfrm>
-            <a:off x="548640" y="1463040"/>
+            <a:off x="548640" y="1325880"/>
             <a:ext cx="11064240" cy="4937760"/>
           </a:xfrm>
           <a:prstGeom prst="rect">
@@ -6104,76 +6836,191 @@
           <a:p>
             <a:pPr>
               <a:spcAft>
-                <a:spcPts val="800"/>
+                <a:spcPts val="900"/>
               </a:spcAft>
-              <a:defRPr sz="1800">
+              <a:defRPr sz="1700">
                 <a:solidFill>
                   <a:srgbClr val="222222"/>
                 </a:solidFill>
               </a:defRPr>
             </a:pPr>
             <a:r>
-              <a:t>Same test set, same protocol: regression 34.41 dB / 0.9285 SSIM  vs  generative 28.36 dB / 0.790 SSIM.</a:t>
+              <a:t>Reproduced in-repo, SAME protocol (A-strict):</a:t>
+            </a:r>
+          </a:p>
+          <a:p>
+            <a:pPr lvl="1">
+              <a:spcAft>
+                <a:spcPts val="400"/>
+              </a:spcAft>
+              <a:defRPr sz="1500">
+                <a:solidFill>
+                  <a:srgbClr val="444444"/>
+                </a:solidFill>
+              </a:defRPr>
+            </a:pPr>
+            <a:r>
+              <a:t>SwinIR (light/largeish) · EDSR-baseline ✓ · RCAN / SRResNet / RRDB (pipeline).</a:t>
             </a:r>
           </a:p>
           <a:p>
             <a:pPr>
               <a:spcAft>
-                <a:spcPts val="800"/>
+                <a:spcPts val="900"/>
               </a:spcAft>
-              <a:defRPr sz="1800">
+              <a:defRPr sz="1700">
                 <a:solidFill>
                   <a:srgbClr val="222222"/>
                 </a:solidFill>
               </a:defRPr>
             </a:pPr>
             <a:r>
-              <a:t>Generative trades ~6 dB fidelity for higher no-reference IQA (Blau &amp; Michaeli, CVPR 2018).</a:t>
+              <a:t>Cited with an explicit protocol tag, never mixed into a claim:</a:t>
+            </a:r>
+          </a:p>
+          <a:p>
+            <a:pPr lvl="1">
+              <a:spcAft>
+                <a:spcPts val="400"/>
+              </a:spcAft>
+              <a:defRPr sz="1500">
+                <a:solidFill>
+                  <a:srgbClr val="444444"/>
+                </a:solidFill>
+              </a:defRPr>
+            </a:pPr>
+            <a:r>
+              <a:t>GAN real-ISR: BSRGAN · Real-ESRGAN · LDL · FeMaSR  (D-blind / B-128/512).</a:t>
+            </a:r>
+          </a:p>
+          <a:p>
+            <a:pPr lvl="1">
+              <a:spcAft>
+                <a:spcPts val="400"/>
+              </a:spcAft>
+              <a:defRPr sz="1500">
+                <a:solidFill>
+                  <a:srgbClr val="444444"/>
+                </a:solidFill>
+              </a:defRPr>
+            </a:pPr>
+            <a:r>
+              <a:t>Diffusion: StableSR · DiffBIR · SeeSR · ResShift · SinSR · OSEDiff · AdcSR ·</a:t>
+            </a:r>
+          </a:p>
+          <a:p>
+            <a:pPr lvl="1">
+              <a:spcAft>
+                <a:spcPts val="400"/>
+              </a:spcAft>
+              <a:defRPr sz="1500">
+                <a:solidFill>
+                  <a:srgbClr val="444444"/>
+                </a:solidFill>
+              </a:defRPr>
+            </a:pPr>
+            <a:r>
+              <a:t>TSD-SR · TinySR · PURE · RealSR-R1  — 22.6–28.7 dB on a synthetically re-degraded</a:t>
+            </a:r>
+          </a:p>
+          <a:p>
+            <a:pPr lvl="1">
+              <a:spcAft>
+                <a:spcPts val="400"/>
+              </a:spcAft>
+              <a:defRPr sz="1500">
+                <a:solidFill>
+                  <a:srgbClr val="444444"/>
+                </a:solidFill>
+              </a:defRPr>
+            </a:pPr>
+            <a:r>
+              <a:t>RealSR (a harder/different input).</a:t>
             </a:r>
           </a:p>
           <a:p>
             <a:pPr>
               <a:spcAft>
-                <a:spcPts val="800"/>
+                <a:spcPts val="900"/>
               </a:spcAft>
-              <a:defRPr sz="1800">
+              <a:defRPr sz="1700">
                 <a:solidFill>
                   <a:srgbClr val="222222"/>
                 </a:solidFill>
               </a:defRPr>
             </a:pPr>
             <a:r>
-              <a:t>On RealSR: the fidelity frontier is capped by physics (registration),</a:t>
-            </a:r>
-          </a:p>
+              <a:t>Full table + sources: docs/baseline/README.md  ·  citations: exp/RELATED_WORK_AND_UPPER_BOUND.md</a:t>
+            </a:r>
+          </a:p>
+        </p:txBody>
+      </p:sp>
+      <p:sp>
+        <p:nvSpPr>
+          <p:cNvPr id="4" name="TextBox 3"/>
+          <p:cNvSpPr txBox="1"/>
+          <p:nvPr/>
+        </p:nvSpPr>
+        <p:spPr>
+          <a:xfrm>
+            <a:off x="457200" y="6419088"/>
+            <a:ext cx="8686800" cy="320040"/>
+          </a:xfrm>
+          <a:prstGeom prst="rect">
+            <a:avLst/>
+          </a:prstGeom>
+          <a:noFill/>
+        </p:spPr>
+        <p:txBody>
+          <a:bodyPr wrap="none">
+            <a:spAutoFit/>
+          </a:bodyPr>
+          <a:lstStyle/>
           <a:p>
             <a:pPr>
-              <a:spcAft>
-                <a:spcPts val="800"/>
-              </a:spcAft>
-              <a:defRPr sz="1800">
-                <a:solidFill>
-                  <a:srgbClr val="222222"/>
-                </a:solidFill>
-              </a:defRPr>
-            </a:pPr>
-            <a:r>
-              <a:t>the realism frontier is capped by the 390-pair data budget.</a:t>
-            </a:r>
-          </a:p>
-          <a:p>
-            <a:pPr>
-              <a:spcAft>
-                <a:spcPts val="800"/>
-              </a:spcAft>
-              <a:defRPr sz="1800">
-                <a:solidFill>
-                  <a:srgbClr val="222222"/>
-                </a:solidFill>
-              </a:defRPr>
-            </a:pPr>
-            <a:r>
-              <a:t>→ Practical conclusion: PSNR has no sustainable headroom at ×2; the future is perceptual.</a:t>
+              <a:defRPr sz="900">
+                <a:solidFill>
+                  <a:srgbClr val="888888"/>
+                </a:solidFill>
+              </a:defRPr>
+            </a:pPr>
+            <a:r>
+              <a:t>RealSR ×2 · Real-World SR · stride-1 + wavelet-HF + Muon + TTA</a:t>
+            </a:r>
+          </a:p>
+        </p:txBody>
+      </p:sp>
+      <p:sp>
+        <p:nvSpPr>
+          <p:cNvPr id="5" name="TextBox 4"/>
+          <p:cNvSpPr txBox="1"/>
+          <p:nvPr/>
+        </p:nvSpPr>
+        <p:spPr>
+          <a:xfrm>
+            <a:off x="11247120" y="6419088"/>
+            <a:ext cx="822960" cy="320040"/>
+          </a:xfrm>
+          <a:prstGeom prst="rect">
+            <a:avLst/>
+          </a:prstGeom>
+          <a:noFill/>
+        </p:spPr>
+        <p:txBody>
+          <a:bodyPr wrap="none">
+            <a:spAutoFit/>
+          </a:bodyPr>
+          <a:lstStyle/>
+          <a:p>
+            <a:pPr algn="r">
+              <a:defRPr sz="1000">
+                <a:solidFill>
+                  <a:srgbClr val="888888"/>
+                </a:solidFill>
+              </a:defRPr>
+            </a:pPr>
+            <a:r>
+              <a:t>7</a:t>
             </a:r>
           </a:p>
         </p:txBody>
@@ -6198,35 +7045,52 @@
       <p:grpSpPr/>
       <p:sp>
         <p:nvSpPr>
-          <p:cNvPr id="2" name="TextBox 1"/>
-          <p:cNvSpPr txBox="1"/>
+          <p:cNvPr id="2" name="Rectangle 1"/>
+          <p:cNvSpPr/>
           <p:nvPr/>
         </p:nvSpPr>
         <p:spPr>
           <a:xfrm>
-            <a:off x="457200" y="320040"/>
-            <a:ext cx="11247120" cy="914400"/>
+            <a:off x="0" y="0"/>
+            <a:ext cx="12191695" cy="1051560"/>
           </a:xfrm>
           <a:prstGeom prst="rect">
             <a:avLst/>
           </a:prstGeom>
-          <a:noFill/>
+          <a:solidFill>
+            <a:srgbClr val="1F4E79"/>
+          </a:solidFill>
+          <a:ln>
+            <a:noFill/>
+          </a:ln>
         </p:spPr>
-        <p:txBody>
-          <a:bodyPr wrap="none">
-            <a:spAutoFit/>
-          </a:bodyPr>
-          <a:lstStyle/>
-          <a:p>
-            <a:pPr>
-              <a:defRPr sz="3000" b="1">
-                <a:solidFill>
-                  <a:srgbClr val="1F4E79"/>
-                </a:solidFill>
-              </a:defRPr>
-            </a:pPr>
-            <a:r>
-              <a:t>Negative results (all evaluated, all reported)</a:t>
+        <p:style>
+          <a:lnRef idx="1">
+            <a:schemeClr val="accent1"/>
+          </a:lnRef>
+          <a:fillRef idx="3">
+            <a:schemeClr val="accent1"/>
+          </a:fillRef>
+          <a:effectRef idx="2">
+            <a:schemeClr val="accent1"/>
+          </a:effectRef>
+          <a:fontRef idx="minor">
+            <a:schemeClr val="lt1"/>
+          </a:fontRef>
+        </p:style>
+        <p:txBody>
+          <a:bodyPr rtlCol="0" anchor="ctr" wrap="square" lIns="411480" tIns="109728"/>
+          <a:lstStyle/>
+          <a:p>
+            <a:pPr algn="ctr">
+              <a:defRPr sz="2600" b="1">
+                <a:solidFill>
+                  <a:srgbClr val="FFFFFF"/>
+                </a:solidFill>
+              </a:defRPr>
+            </a:pPr>
+            <a:r>
+              <a:t>Negative results — 28+ arms, all reported</a:t>
             </a:r>
           </a:p>
         </p:txBody>
@@ -6239,7 +7103,7 @@
         </p:nvSpPr>
         <p:spPr>
           <a:xfrm>
-            <a:off x="548640" y="1463040"/>
+            <a:off x="548640" y="1325880"/>
             <a:ext cx="11064240" cy="4937760"/>
           </a:xfrm>
           <a:prstGeom prst="rect">
@@ -6255,76 +7119,191 @@
           <a:p>
             <a:pPr>
               <a:spcAft>
-                <a:spcPts val="800"/>
+                <a:spcPts val="900"/>
               </a:spcAft>
-              <a:defRPr sz="1800">
+              <a:defRPr sz="1700">
                 <a:solidFill>
                   <a:srgbClr val="222222"/>
                 </a:solidFill>
               </a:defRPr>
             </a:pPr>
             <a:r>
-              <a:t>Reporting 28+ runs that did NOT help — same protocol, honest verdicts.</a:t>
+              <a:t>Discriminative-capacity ceiling: capacity 5M→72.5M and pyramid flattening: saturating/negative.</a:t>
             </a:r>
           </a:p>
           <a:p>
             <a:pPr>
               <a:spcAft>
-                <a:spcPts val="800"/>
+                <a:spcPts val="900"/>
               </a:spcAft>
-              <a:defRPr sz="1800">
+              <a:defRPr sz="1700">
                 <a:solidFill>
                   <a:srgbClr val="222222"/>
                 </a:solidFill>
               </a:defRPr>
             </a:pPr>
             <a:r>
-              <a:t>Mamba/VSS: −2.3 dB at equal sample budget (memory-bound scan, poor sample efficiency).</a:t>
+              <a:t>Mamba / VSS scan backbone: −2.3 dB at equal sample budget (memory-bound, poor sample efficiency).</a:t>
             </a:r>
           </a:p>
           <a:p>
             <a:pPr>
               <a:spcAft>
-                <a:spcPts val="800"/>
+                <a:spcPts val="900"/>
               </a:spcAft>
-              <a:defRPr sz="1800">
+              <a:defRPr sz="1700">
                 <a:solidFill>
                   <a:srgbClr val="222222"/>
                 </a:solidFill>
               </a:defRPr>
             </a:pPr>
             <a:r>
-              <a:t>Dual-branch wavelet U-Net, DTCWT basis, D4 equivariance, coord injection, freq-routing, gated FFN.</a:t>
+              <a:t>Loss/geometry regularisers tried &amp; rejected: D4 equivariance, coord injection, freq-routing, gated FFN.</a:t>
             </a:r>
           </a:p>
           <a:p>
             <a:pPr>
               <a:spcAft>
-                <a:spcPts val="800"/>
+                <a:spcPts val="900"/>
               </a:spcAft>
-              <a:defRPr sz="1800">
+              <a:defRPr sz="1700">
                 <a:solidFill>
                   <a:srgbClr val="222222"/>
                 </a:solidFill>
               </a:defRPr>
             </a:pPr>
             <a:r>
-              <a:t>Frequency-domain rectified flow (HF residual generation): monotone image destruction; judged negative.</a:t>
+              <a:t>Frequency experiments: bijective wavelet U-Net, dual-branch wavelet U-Net, DTCWT basis — none beat</a:t>
+            </a:r>
+          </a:p>
+          <a:p>
+            <a:pPr lvl="1">
+              <a:spcAft>
+                <a:spcPts val="400"/>
+              </a:spcAft>
+              <a:defRPr sz="1500">
+                <a:solidFill>
+                  <a:srgbClr val="444444"/>
+                </a:solidFill>
+              </a:defRPr>
+            </a:pPr>
+            <a:r>
+              <a:t>the plain wavelet-HF loss + shift-ensemble.</a:t>
             </a:r>
           </a:p>
           <a:p>
             <a:pPr>
               <a:spcAft>
-                <a:spcPts val="800"/>
+                <a:spcPts val="900"/>
               </a:spcAft>
-              <a:defRPr sz="1800">
+              <a:defRPr sz="1700">
                 <a:solidFill>
                   <a:srgbClr val="222222"/>
                 </a:solidFill>
               </a:defRPr>
             </a:pPr>
             <a:r>
-              <a:t>Adversarial degradation mining (N3, with Muon): neutral — does not break the plateau.</a:t>
+              <a:t>Generative: pixel/latent diffusion, frequency-domain rectified flow (HF residual), adversarial data</a:t>
+            </a:r>
+          </a:p>
+          <a:p>
+            <a:pPr lvl="1">
+              <a:spcAft>
+                <a:spcPts val="400"/>
+              </a:spcAft>
+              <a:defRPr sz="1500">
+                <a:solidFill>
+                  <a:srgbClr val="444444"/>
+                </a:solidFill>
+              </a:defRPr>
+            </a:pPr>
+            <a:r>
+              <a:t>mining (N3) — fidelity collapses or plateau (consistent with the ceiling).</a:t>
+            </a:r>
+          </a:p>
+          <a:p>
+            <a:pPr>
+              <a:spcAft>
+                <a:spcPts val="900"/>
+              </a:spcAft>
+              <a:defRPr sz="1700">
+                <a:solidFill>
+                  <a:srgbClr val="222222"/>
+                </a:solidFill>
+              </a:defRPr>
+            </a:pPr>
+            <a:r>
+              <a:t>Lesson: at 390 real pairs, discriminative regression already captures the recoverable signal.</a:t>
+            </a:r>
+          </a:p>
+        </p:txBody>
+      </p:sp>
+      <p:sp>
+        <p:nvSpPr>
+          <p:cNvPr id="4" name="TextBox 3"/>
+          <p:cNvSpPr txBox="1"/>
+          <p:nvPr/>
+        </p:nvSpPr>
+        <p:spPr>
+          <a:xfrm>
+            <a:off x="457200" y="6419088"/>
+            <a:ext cx="8686800" cy="320040"/>
+          </a:xfrm>
+          <a:prstGeom prst="rect">
+            <a:avLst/>
+          </a:prstGeom>
+          <a:noFill/>
+        </p:spPr>
+        <p:txBody>
+          <a:bodyPr wrap="none">
+            <a:spAutoFit/>
+          </a:bodyPr>
+          <a:lstStyle/>
+          <a:p>
+            <a:pPr>
+              <a:defRPr sz="900">
+                <a:solidFill>
+                  <a:srgbClr val="888888"/>
+                </a:solidFill>
+              </a:defRPr>
+            </a:pPr>
+            <a:r>
+              <a:t>RealSR ×2 · Real-World SR · stride-1 + wavelet-HF + Muon + TTA</a:t>
+            </a:r>
+          </a:p>
+        </p:txBody>
+      </p:sp>
+      <p:sp>
+        <p:nvSpPr>
+          <p:cNvPr id="5" name="TextBox 4"/>
+          <p:cNvSpPr txBox="1"/>
+          <p:nvPr/>
+        </p:nvSpPr>
+        <p:spPr>
+          <a:xfrm>
+            <a:off x="11247120" y="6419088"/>
+            <a:ext cx="822960" cy="320040"/>
+          </a:xfrm>
+          <a:prstGeom prst="rect">
+            <a:avLst/>
+          </a:prstGeom>
+          <a:noFill/>
+        </p:spPr>
+        <p:txBody>
+          <a:bodyPr wrap="none">
+            <a:spAutoFit/>
+          </a:bodyPr>
+          <a:lstStyle/>
+          <a:p>
+            <a:pPr algn="r">
+              <a:defRPr sz="1000">
+                <a:solidFill>
+                  <a:srgbClr val="888888"/>
+                </a:solidFill>
+              </a:defRPr>
+            </a:pPr>
+            <a:r>
+              <a:t>8</a:t>
             </a:r>
           </a:p>
         </p:txBody>
